--- a/26/Lógica Computacional/LAB1/LAB1_Introduccion_a_Prolog.pptx
+++ b/26/Lógica Computacional/LAB1/LAB1_Introduccion_a_Prolog.pptx
@@ -9,6 +9,7 @@
   </p:notesMasterIdLst>
   <p:sldIdLst>
     <p:sldId xmlns:r="http://schemas.openxmlformats.org/officeDocument/2006/relationships" id="256" r:id="R7659403b494c4aa4"/>
+    <p:sldId xmlns:r="http://schemas.openxmlformats.org/officeDocument/2006/relationships" id="295" r:id="Ra4df9922c4234bd3"/>
     <p:sldId xmlns:r="http://schemas.openxmlformats.org/officeDocument/2006/relationships" id="257" r:id="R9fb27439572246eb"/>
     <p:sldId xmlns:r="http://schemas.openxmlformats.org/officeDocument/2006/relationships" id="258" r:id="Rc8690086080b4782"/>
     <p:sldId xmlns:r="http://schemas.openxmlformats.org/officeDocument/2006/relationships" id="259" r:id="R94aa058f30e549db"/>
@@ -47,7 +48,6 @@
     <p:sldId xmlns:r="http://schemas.openxmlformats.org/officeDocument/2006/relationships" id="292" r:id="Re66f2a47609141c7"/>
     <p:sldId xmlns:r="http://schemas.openxmlformats.org/officeDocument/2006/relationships" id="293" r:id="Rd5ea7b93c887475f"/>
     <p:sldId xmlns:r="http://schemas.openxmlformats.org/officeDocument/2006/relationships" id="294" r:id="R5702867364e9440a"/>
-    <p:sldId xmlns:r="http://schemas.openxmlformats.org/officeDocument/2006/relationships" id="295" r:id="Ra4df9922c4234bd3"/>
   </p:sldIdLst>
   <p:sldSz cx="11704320" cy="6583680"/>
   <p:notesSz cx="6858000" cy="9144000"/>
@@ -4653,7 +4653,7 @@
                 <a:ea typeface="Arial"/>
                 <a:cs typeface="Arial"/>
               </a:rPr>
-              <a:t>10</a:t>
+              <a:t>11</a:t>
             </a:r>
           </a:p>
         </p:txBody>
@@ -5302,7 +5302,7 @@
                 <a:ea typeface="Arial"/>
                 <a:cs typeface="Arial"/>
               </a:rPr>
-              <a:t>11</a:t>
+              <a:t>12</a:t>
             </a:r>
           </a:p>
         </p:txBody>
@@ -6122,7 +6122,7 @@
                 <a:ea typeface="Arial"/>
                 <a:cs typeface="Arial"/>
               </a:rPr>
-              <a:t>12</a:t>
+              <a:t>13</a:t>
             </a:r>
           </a:p>
         </p:txBody>
@@ -6755,7 +6755,7 @@
                 <a:ea typeface="Arial"/>
                 <a:cs typeface="Arial"/>
               </a:rPr>
-              <a:t>13</a:t>
+              <a:t>14</a:t>
             </a:r>
           </a:p>
         </p:txBody>
@@ -7599,7 +7599,7 @@
                 <a:ea typeface="Arial"/>
                 <a:cs typeface="Arial"/>
               </a:rPr>
-              <a:t>14</a:t>
+              <a:t>15</a:t>
             </a:r>
           </a:p>
         </p:txBody>
@@ -8558,7 +8558,7 @@
                 <a:ea typeface="Arial"/>
                 <a:cs typeface="Arial"/>
               </a:rPr>
-              <a:t>15</a:t>
+              <a:t>16</a:t>
             </a:r>
           </a:p>
         </p:txBody>
@@ -9308,7 +9308,7 @@
                 <a:ea typeface="Arial"/>
                 <a:cs typeface="Arial"/>
               </a:rPr>
-              <a:t>16</a:t>
+              <a:t>17</a:t>
             </a:r>
           </a:p>
         </p:txBody>
@@ -9929,7 +9929,7 @@
                 <a:ea typeface="Arial"/>
                 <a:cs typeface="Arial"/>
               </a:rPr>
-              <a:t>17</a:t>
+              <a:t>18</a:t>
             </a:r>
           </a:p>
         </p:txBody>
@@ -10550,7 +10550,7 @@
                 <a:ea typeface="Arial"/>
                 <a:cs typeface="Arial"/>
               </a:rPr>
-              <a:t>18</a:t>
+              <a:t>19</a:t>
             </a:r>
           </a:p>
         </p:txBody>
@@ -11395,7 +11395,7 @@
                 <a:ea typeface="Arial"/>
                 <a:cs typeface="Arial"/>
               </a:rPr>
-              <a:t>19</a:t>
+              <a:t>20</a:t>
             </a:r>
           </a:p>
         </p:txBody>
@@ -12825,7 +12825,7 @@
                 <a:ea typeface="Arial"/>
                 <a:cs typeface="Arial"/>
               </a:rPr>
-              <a:t>2</a:t>
+              <a:t>3</a:t>
             </a:r>
           </a:p>
         </p:txBody>
@@ -13444,7 +13444,7 @@
                 <a:ea typeface="Arial"/>
                 <a:cs typeface="Arial"/>
               </a:rPr>
-              <a:t>20</a:t>
+              <a:t>21</a:t>
             </a:r>
           </a:p>
         </p:txBody>
@@ -14125,7 +14125,7 @@
                 <a:ea typeface="Arial"/>
                 <a:cs typeface="Arial"/>
               </a:rPr>
-              <a:t>21</a:t>
+              <a:t>22</a:t>
             </a:r>
           </a:p>
         </p:txBody>
@@ -14894,7 +14894,7 @@
                 <a:ea typeface="Arial"/>
                 <a:cs typeface="Arial"/>
               </a:rPr>
-              <a:t>22</a:t>
+              <a:t>23</a:t>
             </a:r>
           </a:p>
         </p:txBody>
@@ -15572,7 +15572,7 @@
                 <a:ea typeface="Arial"/>
                 <a:cs typeface="Arial"/>
               </a:rPr>
-              <a:t>23</a:t>
+              <a:t>24</a:t>
             </a:r>
           </a:p>
         </p:txBody>
@@ -16203,7 +16203,7 @@
                 <a:ea typeface="Arial"/>
                 <a:cs typeface="Arial"/>
               </a:rPr>
-              <a:t>24</a:t>
+              <a:t>25</a:t>
             </a:r>
           </a:p>
         </p:txBody>
@@ -17495,7 +17495,7 @@
                 <a:ea typeface="Arial"/>
                 <a:cs typeface="Arial"/>
               </a:rPr>
-              <a:t>25</a:t>
+              <a:t>26</a:t>
             </a:r>
           </a:p>
         </p:txBody>
@@ -18139,7 +18139,7 @@
                 <a:ea typeface="Arial"/>
                 <a:cs typeface="Arial"/>
               </a:rPr>
-              <a:t>26</a:t>
+              <a:t>27</a:t>
             </a:r>
           </a:p>
         </p:txBody>
@@ -18931,7 +18931,7 @@
                 <a:ea typeface="Arial"/>
                 <a:cs typeface="Arial"/>
               </a:rPr>
-              <a:t>27</a:t>
+              <a:t>28</a:t>
             </a:r>
           </a:p>
         </p:txBody>
@@ -19637,7 +19637,7 @@
                 <a:ea typeface="Arial"/>
                 <a:cs typeface="Arial"/>
               </a:rPr>
-              <a:t>28</a:t>
+              <a:t>29</a:t>
             </a:r>
           </a:p>
         </p:txBody>
@@ -20429,7 +20429,7 @@
                 <a:ea typeface="Arial"/>
                 <a:cs typeface="Arial"/>
               </a:rPr>
-              <a:t>29</a:t>
+              <a:t>30</a:t>
             </a:r>
           </a:p>
         </p:txBody>
@@ -21135,7 +21135,7 @@
                 <a:ea typeface="Arial"/>
                 <a:cs typeface="Arial"/>
               </a:rPr>
-              <a:t>3</a:t>
+              <a:t>4</a:t>
             </a:r>
           </a:p>
         </p:txBody>
@@ -21948,7 +21948,7 @@
                 <a:ea typeface="Arial"/>
                 <a:cs typeface="Arial"/>
               </a:rPr>
-              <a:t>30</a:t>
+              <a:t>31</a:t>
             </a:r>
           </a:p>
         </p:txBody>
@@ -22683,7 +22683,7 @@
                 <a:ea typeface="Arial"/>
                 <a:cs typeface="Arial"/>
               </a:rPr>
-              <a:t>31</a:t>
+              <a:t>32</a:t>
             </a:r>
           </a:p>
         </p:txBody>
@@ -23423,7 +23423,7 @@
                 <a:ea typeface="Arial"/>
                 <a:cs typeface="Arial"/>
               </a:rPr>
-              <a:t>32</a:t>
+              <a:t>33</a:t>
             </a:r>
           </a:p>
         </p:txBody>
@@ -24135,7 +24135,7 @@
                 <a:ea typeface="Arial"/>
                 <a:cs typeface="Arial"/>
               </a:rPr>
-              <a:t>33</a:t>
+              <a:t>34</a:t>
             </a:r>
           </a:p>
         </p:txBody>
@@ -24836,7 +24836,7 @@
                 <a:ea typeface="Arial"/>
                 <a:cs typeface="Arial"/>
               </a:rPr>
-              <a:t>34</a:t>
+              <a:t>35</a:t>
             </a:r>
           </a:p>
         </p:txBody>
@@ -25646,7 +25646,7 @@
                 <a:ea typeface="Arial"/>
                 <a:cs typeface="Arial"/>
               </a:rPr>
-              <a:t>35</a:t>
+              <a:t>36</a:t>
             </a:r>
           </a:p>
         </p:txBody>
@@ -26584,7 +26584,7 @@
                 <a:ea typeface="Arial"/>
                 <a:cs typeface="Arial"/>
               </a:rPr>
-              <a:t>36</a:t>
+              <a:t>37</a:t>
             </a:r>
           </a:p>
         </p:txBody>
@@ -27296,7 +27296,7 @@
                 <a:ea typeface="Arial"/>
                 <a:cs typeface="Arial"/>
               </a:rPr>
-              <a:t>37</a:t>
+              <a:t>38</a:t>
             </a:r>
           </a:p>
         </p:txBody>
@@ -27997,7 +27997,7 @@
                 <a:ea typeface="Arial"/>
                 <a:cs typeface="Arial"/>
               </a:rPr>
-              <a:t>38</a:t>
+              <a:t>39</a:t>
             </a:r>
           </a:p>
         </p:txBody>
@@ -28910,7 +28910,7 @@
                 <a:ea typeface="Arial"/>
                 <a:cs typeface="Arial"/>
               </a:rPr>
-              <a:t>39</a:t>
+              <a:t>40</a:t>
             </a:r>
           </a:p>
         </p:txBody>
@@ -29646,7 +29646,7 @@
                 <a:ea typeface="Arial"/>
                 <a:cs typeface="Arial"/>
               </a:rPr>
-              <a:t>4</a:t>
+              <a:t>5</a:t>
             </a:r>
           </a:p>
         </p:txBody>
@@ -30051,10 +30051,10 @@
       </p:grpSpPr>
       <p:sp>
         <p:nvSpPr>
-          <p:cNvPr id="10" name="">
-            <a:extLst xmlns:a="http://schemas.openxmlformats.org/drawingml/2006/main">
-              <a:ext uri="{FF2B5EF4-FFF2-40B4-BE49-F238E27FC236}">
-                <a16:creationId xmlns:a16="http://schemas.microsoft.com/office/drawing/2014/main" id="{BF85950B-4825-4323-81F5-34C3F4E1F9FE}"/>
+          <p:cNvPr id="13" name="">
+            <a:extLst xmlns:a="http://schemas.openxmlformats.org/drawingml/2006/main">
+              <a:ext uri="{FF2B5EF4-FFF2-40B4-BE49-F238E27FC236}">
+                <a16:creationId xmlns:a16="http://schemas.microsoft.com/office/drawing/2014/main" id="{81EF26E8-340C-4E14-AABB-85146EF7CC8F}"/>
               </a:ext>
             </a:extLst>
           </p:cNvPr>
@@ -30084,7 +30084,7 @@
           <p:cNvPr id="2" name="">
             <a:extLst xmlns:a="http://schemas.openxmlformats.org/drawingml/2006/main">
               <a:ext uri="{FF2B5EF4-FFF2-40B4-BE49-F238E27FC236}">
-                <a16:creationId xmlns:a16="http://schemas.microsoft.com/office/drawing/2014/main" id="{E47229D2-97AE-4E75-95C3-47F0F6D2980A}"/>
+                <a16:creationId xmlns:a16="http://schemas.microsoft.com/office/drawing/2014/main" id="{7ABFC343-6F76-42E9-96BD-310ABB0E5CFA}"/>
               </a:ext>
             </a:extLst>
           </p:cNvPr>
@@ -30114,7 +30114,7 @@
           <p:cNvPr id="3" name="">
             <a:extLst xmlns:a="http://schemas.openxmlformats.org/drawingml/2006/main">
               <a:ext uri="{FF2B5EF4-FFF2-40B4-BE49-F238E27FC236}">
-                <a16:creationId xmlns:a16="http://schemas.microsoft.com/office/drawing/2014/main" id="{3D5B8B85-41A5-48B6-B8AA-42DC15CBFEEE}"/>
+                <a16:creationId xmlns:a16="http://schemas.microsoft.com/office/drawing/2014/main" id="{CF878E92-4402-4C9C-BD46-36DCBF0E5A5B}"/>
               </a:ext>
             </a:extLst>
           </p:cNvPr>
@@ -30161,7 +30161,7 @@
                 <a:ea typeface="Arial"/>
                 <a:cs typeface="Arial"/>
               </a:rPr>
-              <a:t>Práctica 1 · 3 · Ejercicios</a:t>
+              <a:t>Práctica 1 · 1 · Preparación y lenguaje</a:t>
             </a:r>
           </a:p>
         </p:txBody>
@@ -30171,7 +30171,7 @@
           <p:cNvPr id="4" name="">
             <a:extLst xmlns:a="http://schemas.openxmlformats.org/drawingml/2006/main">
               <a:ext uri="{FF2B5EF4-FFF2-40B4-BE49-F238E27FC236}">
-                <a16:creationId xmlns:a16="http://schemas.microsoft.com/office/drawing/2014/main" id="{943D9EA1-3EAB-42E8-A60B-D63867668C2F}"/>
+                <a16:creationId xmlns:a16="http://schemas.microsoft.com/office/drawing/2014/main" id="{37094E80-2AAE-434B-9020-F26894343881}"/>
               </a:ext>
             </a:extLst>
           </p:cNvPr>
@@ -30218,7 +30218,7 @@
                 <a:ea typeface="Arial"/>
                 <a:cs typeface="Arial"/>
               </a:rPr>
-              <a:t>Ideas esenciales y errores habituales</a:t>
+              <a:t>Horario · Erik Figueiral Alonso</a:t>
             </a:r>
           </a:p>
         </p:txBody>
@@ -30228,7 +30228,7 @@
           <p:cNvPr id="5" name="">
             <a:extLst xmlns:a="http://schemas.openxmlformats.org/drawingml/2006/main">
               <a:ext uri="{FF2B5EF4-FFF2-40B4-BE49-F238E27FC236}">
-                <a16:creationId xmlns:a16="http://schemas.microsoft.com/office/drawing/2014/main" id="{DD0D4177-8E19-4911-B206-9DEEB28FF941}"/>
+                <a16:creationId xmlns:a16="http://schemas.microsoft.com/office/drawing/2014/main" id="{5686ACD4-81DB-480C-BD63-36E322765FD7}"/>
               </a:ext>
             </a:extLst>
           </p:cNvPr>
@@ -30285,7 +30285,7 @@
           <p:cNvPr id="6" name="">
             <a:extLst xmlns:a="http://schemas.openxmlformats.org/drawingml/2006/main">
               <a:ext uri="{FF2B5EF4-FFF2-40B4-BE49-F238E27FC236}">
-                <a16:creationId xmlns:a16="http://schemas.microsoft.com/office/drawing/2014/main" id="{FAF074E1-24C6-4CAB-84C0-2AD830857CA6}"/>
+                <a16:creationId xmlns:a16="http://schemas.microsoft.com/office/drawing/2014/main" id="{446B0959-DE31-4EA9-9039-5BFDA83845E6}"/>
               </a:ext>
             </a:extLst>
           </p:cNvPr>
@@ -30332,393 +30332,349 @@
                 <a:ea typeface="Arial"/>
                 <a:cs typeface="Arial"/>
               </a:rPr>
-              <a:t>40</a:t>
-            </a:r>
-          </a:p>
-        </p:txBody>
-      </p:sp>
-      <p:graphicFrame>
-        <p:nvGraphicFramePr>
-          <p:cNvPr id="16" name=""/>
-          <p:cNvGraphicFramePr/>
-          <p:nvPr/>
-        </p:nvGraphicFramePr>
-        <p:xfrm>
-          <a:off xmlns:a="http://schemas.openxmlformats.org/drawingml/2006/main" x="822960" y="1645920"/>
-          <a:ext xmlns:a="http://schemas.openxmlformats.org/drawingml/2006/main" cx="10149840" cy="3154680"/>
-        </p:xfrm>
-        <a:graphic xmlns:a="http://schemas.openxmlformats.org/drawingml/2006/main">
-          <a:graphicData uri="http://schemas.openxmlformats.org/drawingml/2006/table">
-            <a:tbl>
-              <a:tblPr/>
-              <a:tblGrid>
-                <a:gridCol w="4023360"/>
-                <a:gridCol w="6126480"/>
-              </a:tblGrid>
-              <a:tr h="630936">
-                <a:tc>
-                  <a:txBody>
-                    <a:bodyPr/>
-                    <a:lstStyle/>
-                    <a:p>
-                      <a:r>
-                        <a:rPr sz="1728" b="1">
-                          <a:solidFill>
-                            <a:srgbClr val="FFFFFF"/>
-                          </a:solidFill>
-                          <a:latin typeface="Arial"/>
-                          <a:ea typeface="Arial"/>
-                          <a:cs typeface="Arial"/>
-                        </a:rPr>
-                        <a:t>Idea</a:t>
-                      </a:r>
-                    </a:p>
-                  </a:txBody>
-                  <a:tcPr marL="91440" marR="91440" marT="45720" marB="45720">
-                    <a:solidFill>
-                      <a:srgbClr val="70436F"/>
-                    </a:solidFill>
-                  </a:tcPr>
-                </a:tc>
-                <a:tc>
-                  <a:txBody>
-                    <a:bodyPr/>
-                    <a:lstStyle/>
-                    <a:p>
-                      <a:r>
-                        <a:rPr sz="1728" b="1">
-                          <a:solidFill>
-                            <a:srgbClr val="FFFFFF"/>
-                          </a:solidFill>
-                          <a:latin typeface="Arial"/>
-                          <a:ea typeface="Arial"/>
-                          <a:cs typeface="Arial"/>
-                        </a:rPr>
-                        <a:t>Qué revisar</a:t>
-                      </a:r>
-                    </a:p>
-                  </a:txBody>
-                  <a:tcPr marL="91440" marR="91440" marT="45720" marB="45720">
-                    <a:solidFill>
-                      <a:srgbClr val="70436F"/>
-                    </a:solidFill>
-                  </a:tcPr>
-                </a:tc>
-              </a:tr>
-              <a:tr h="630936">
-                <a:tc>
-                  <a:txBody>
-                    <a:bodyPr/>
-                    <a:lstStyle/>
-                    <a:p>
-                      <a:r>
-                        <a:rPr sz="1728" b="0">
-                          <a:solidFill>
-                            <a:srgbClr val="263442"/>
-                          </a:solidFill>
-                          <a:latin typeface="Arial"/>
-                          <a:ea typeface="Arial"/>
-                          <a:cs typeface="Arial"/>
-                        </a:rPr>
-                        <a:t>Definimos relaciones</a:t>
-                      </a:r>
-                    </a:p>
-                  </a:txBody>
-                  <a:tcPr marL="91440" marR="91440" marT="45720" marB="45720">
-                    <a:solidFill>
-                      <a:srgbClr val="F5EFF5"/>
-                    </a:solidFill>
-                  </a:tcPr>
-                </a:tc>
-                <a:tc>
-                  <a:txBody>
-                    <a:bodyPr/>
-                    <a:lstStyle/>
-                    <a:p>
-                      <a:r>
-                        <a:rPr sz="1728" b="0">
-                          <a:solidFill>
-                            <a:srgbClr val="263442"/>
-                          </a:solidFill>
-                          <a:latin typeface="Arial"/>
-                          <a:ea typeface="Arial"/>
-                          <a:cs typeface="Arial"/>
-                        </a:rPr>
-                        <a:t>Escribir primero sintaxis, semántica y firma.</a:t>
-                      </a:r>
-                    </a:p>
-                  </a:txBody>
-                  <a:tcPr marL="91440" marR="91440" marT="45720" marB="45720">
-                    <a:solidFill>
-                      <a:srgbClr val="F5EFF5"/>
-                    </a:solidFill>
-                  </a:tcPr>
-                </a:tc>
-              </a:tr>
-              <a:tr h="630936">
-                <a:tc>
-                  <a:txBody>
-                    <a:bodyPr/>
-                    <a:lstStyle/>
-                    <a:p>
-                      <a:r>
-                        <a:rPr sz="1728" b="0">
-                          <a:solidFill>
-                            <a:srgbClr val="263442"/>
-                          </a:solidFill>
-                          <a:latin typeface="Arial"/>
-                          <a:ea typeface="Arial"/>
-                          <a:cs typeface="Arial"/>
-                        </a:rPr>
-                        <a:t>El intérprete busca pruebas</a:t>
-                      </a:r>
-                    </a:p>
-                  </a:txBody>
-                  <a:tcPr marL="91440" marR="91440" marT="45720" marB="45720">
-                    <a:solidFill>
-                      <a:srgbClr val="FFFFFF"/>
-                    </a:solidFill>
-                  </a:tcPr>
-                </a:tc>
-                <a:tc>
-                  <a:txBody>
-                    <a:bodyPr/>
-                    <a:lstStyle/>
-                    <a:p>
-                      <a:r>
-                        <a:rPr sz="1728" b="0">
-                          <a:solidFill>
-                            <a:srgbClr val="263442"/>
-                          </a:solidFill>
-                          <a:latin typeface="Arial"/>
-                          <a:ea typeface="Arial"/>
-                          <a:cs typeface="Arial"/>
-                        </a:rPr>
-                        <a:t>Leer los objetivos y las sustituciones del árbol.</a:t>
-                      </a:r>
-                    </a:p>
-                  </a:txBody>
-                  <a:tcPr marL="91440" marR="91440" marT="45720" marB="45720">
-                    <a:solidFill>
-                      <a:srgbClr val="FFFFFF"/>
-                    </a:solidFill>
-                  </a:tcPr>
-                </a:tc>
-              </a:tr>
-              <a:tr h="630936">
-                <a:tc>
-                  <a:txBody>
-                    <a:bodyPr/>
-                    <a:lstStyle/>
-                    <a:p>
-                      <a:r>
-                        <a:rPr sz="1728" b="0">
-                          <a:solidFill>
-                            <a:srgbClr val="263442"/>
-                          </a:solidFill>
-                          <a:latin typeface="Arial"/>
-                          <a:ea typeface="Arial"/>
-                          <a:cs typeface="Arial"/>
-                        </a:rPr>
-                        <a:t>La sintaxis distingue nombres</a:t>
-                      </a:r>
-                    </a:p>
-                  </a:txBody>
-                  <a:tcPr marL="91440" marR="91440" marT="45720" marB="45720">
-                    <a:solidFill>
-                      <a:srgbClr val="F5EFF5"/>
-                    </a:solidFill>
-                  </a:tcPr>
-                </a:tc>
-                <a:tc>
-                  <a:txBody>
-                    <a:bodyPr/>
-                    <a:lstStyle/>
-                    <a:p>
-                      <a:r>
-                        <a:rPr sz="1728" b="0">
-                          <a:solidFill>
-                            <a:srgbClr val="263442"/>
-                          </a:solidFill>
-                          <a:latin typeface="Arial"/>
-                          <a:ea typeface="Arial"/>
-                          <a:cs typeface="Arial"/>
-                        </a:rPr>
-                        <a:t>Natural es variable. S(0) no es un término válido.</a:t>
-                      </a:r>
-                    </a:p>
-                  </a:txBody>
-                  <a:tcPr marL="91440" marR="91440" marT="45720" marB="45720">
-                    <a:solidFill>
-                      <a:srgbClr val="F5EFF5"/>
-                    </a:solidFill>
-                  </a:tcPr>
-                </a:tc>
-              </a:tr>
-              <a:tr h="630936">
-                <a:tc>
-                  <a:txBody>
-                    <a:bodyPr/>
-                    <a:lstStyle/>
-                    <a:p>
-                      <a:r>
-                        <a:rPr sz="1728" b="0">
-                          <a:solidFill>
-                            <a:srgbClr val="263442"/>
-                          </a:solidFill>
-                          <a:latin typeface="Arial"/>
-                          <a:ea typeface="Arial"/>
-                          <a:cs typeface="Arial"/>
-                        </a:rPr>
-                        <a:t>Cargamos y preguntamos</a:t>
-                      </a:r>
-                    </a:p>
-                  </a:txBody>
-                  <a:tcPr marL="91440" marR="91440" marT="45720" marB="45720">
-                    <a:solidFill>
-                      <a:srgbClr val="FFFFFF"/>
-                    </a:solidFill>
-                  </a:tcPr>
-                </a:tc>
-                <a:tc>
-                  <a:txBody>
-                    <a:bodyPr/>
-                    <a:lstStyle/>
-                    <a:p>
-                      <a:r>
-                        <a:rPr sz="1728" b="0">
-                          <a:solidFill>
-                            <a:srgbClr val="263442"/>
-                          </a:solidFill>
-                          <a:latin typeface="Arial"/>
-                          <a:ea typeface="Arial"/>
-                          <a:cs typeface="Arial"/>
-                        </a:rPr>
-                        <a:t>Guardar, consult(natural). y terminar la consulta con .</a:t>
-                      </a:r>
-                    </a:p>
-                  </a:txBody>
-                  <a:tcPr marL="91440" marR="91440" marT="45720" marB="45720">
-                    <a:solidFill>
-                      <a:srgbClr val="FFFFFF"/>
-                    </a:solidFill>
-                  </a:tcPr>
-                </a:tc>
-              </a:tr>
-            </a:tbl>
-          </a:graphicData>
-        </a:graphic>
-      </p:graphicFrame>
+              <a:t>2</a:t>
+            </a:r>
+          </a:p>
+        </p:txBody>
+      </p:sp>
+      <p:sp>
+        <p:nvSpPr>
+          <p:cNvPr id="7" name="">
+            <a:extLst xmlns:a="http://schemas.openxmlformats.org/drawingml/2006/main">
+              <a:ext uri="{FF2B5EF4-FFF2-40B4-BE49-F238E27FC236}">
+                <a16:creationId xmlns:a16="http://schemas.microsoft.com/office/drawing/2014/main" id="{F111D848-80DB-4ECF-A0C5-5B47986CA2CA}"/>
+              </a:ext>
+            </a:extLst>
+          </p:cNvPr>
+          <p:cNvSpPr>
+            <a:spLocks xmlns:a="http://schemas.openxmlformats.org/drawingml/2006/main" noGrp="1"/>
+          </p:cNvSpPr>
+          <p:nvPr/>
+        </p:nvSpPr>
+        <p:spPr>
+          <a:xfrm xmlns:a="http://schemas.openxmlformats.org/drawingml/2006/main">
+            <a:off x="804672" y="1938528"/>
+            <a:ext cx="2743200" cy="457200"/>
+          </a:xfrm>
+          <a:prstGeom xmlns:a="http://schemas.openxmlformats.org/drawingml/2006/main" prst="rect">
+            <a:avLst/>
+          </a:prstGeom>
+          <a:noFill xmlns:a="http://schemas.openxmlformats.org/drawingml/2006/main"/>
+          <a:ln xmlns:a="http://schemas.openxmlformats.org/drawingml/2006/main" w="0">
+            <a:noFill/>
+          </a:ln>
+        </p:spPr>
+        <p:txBody>
+          <a:bodyPr xmlns:a="http://schemas.openxmlformats.org/drawingml/2006/main">
+            <a:noAutofit/>
+          </a:bodyPr>
+          <a:lstStyle xmlns:a="http://schemas.openxmlformats.org/drawingml/2006/main"/>
+          <a:p xmlns:a="http://schemas.openxmlformats.org/drawingml/2006/main">
+            <a:pPr algn="l">
+              <a:defRPr sz="2016" b="1">
+                <a:solidFill>
+                  <a:srgbClr val="70436F"/>
+                </a:solidFill>
+                <a:latin typeface="Arial"/>
+                <a:ea typeface="Arial"/>
+                <a:cs typeface="Arial"/>
+              </a:defRPr>
+            </a:pPr>
+            <a:r>
+              <a:rPr sz="2016" b="1">
+                <a:solidFill>
+                  <a:srgbClr val="70436F"/>
+                </a:solidFill>
+                <a:latin typeface="Arial"/>
+                <a:ea typeface="Arial"/>
+                <a:cs typeface="Arial"/>
+              </a:rPr>
+              <a:t>Lunes</a:t>
+            </a:r>
+          </a:p>
+        </p:txBody>
+      </p:sp>
       <p:sp>
         <p:nvSpPr>
           <p:cNvPr id="8" name="">
             <a:extLst xmlns:a="http://schemas.openxmlformats.org/drawingml/2006/main">
               <a:ext uri="{FF2B5EF4-FFF2-40B4-BE49-F238E27FC236}">
-                <a16:creationId xmlns:a16="http://schemas.microsoft.com/office/drawing/2014/main" id="{FC7800CC-4D8C-451B-9CFF-6EFCD2E0D9C1}"/>
-              </a:ext>
-            </a:extLst>
-          </p:cNvPr>
-          <p:cNvSpPr>
-            <a:spLocks xmlns:a="http://schemas.openxmlformats.org/drawingml/2006/main" noGrp="1"/>
-          </p:cNvSpPr>
-          <p:nvPr/>
-        </p:nvSpPr>
-        <p:spPr>
-          <a:xfrm xmlns:a="http://schemas.openxmlformats.org/drawingml/2006/main">
-            <a:off x="822960" y="5303520"/>
-            <a:ext cx="10149840" cy="594360"/>
-          </a:xfrm>
-          <a:prstGeom xmlns:a="http://schemas.openxmlformats.org/drawingml/2006/main" prst="rect">
-            <a:avLst/>
-          </a:prstGeom>
-          <a:noFill xmlns:a="http://schemas.openxmlformats.org/drawingml/2006/main"/>
-          <a:ln xmlns:a="http://schemas.openxmlformats.org/drawingml/2006/main" w="0">
-            <a:noFill/>
-          </a:ln>
-        </p:spPr>
-        <p:txBody>
-          <a:bodyPr xmlns:a="http://schemas.openxmlformats.org/drawingml/2006/main">
-            <a:noAutofit/>
-          </a:bodyPr>
-          <a:lstStyle xmlns:a="http://schemas.openxmlformats.org/drawingml/2006/main"/>
-          <a:p xmlns:a="http://schemas.openxmlformats.org/drawingml/2006/main">
-            <a:pPr algn="l">
-              <a:defRPr sz="2376" b="1">
+                <a16:creationId xmlns:a16="http://schemas.microsoft.com/office/drawing/2014/main" id="{D4FE7C82-36DD-4CF3-ACDD-3D0DCA4FCC0F}"/>
+              </a:ext>
+            </a:extLst>
+          </p:cNvPr>
+          <p:cNvSpPr>
+            <a:spLocks xmlns:a="http://schemas.openxmlformats.org/drawingml/2006/main" noGrp="1"/>
+          </p:cNvSpPr>
+          <p:nvPr/>
+        </p:nvSpPr>
+        <p:spPr>
+          <a:xfrm xmlns:a="http://schemas.openxmlformats.org/drawingml/2006/main">
+            <a:off x="4297680" y="1938528"/>
+            <a:ext cx="5029200" cy="457200"/>
+          </a:xfrm>
+          <a:prstGeom xmlns:a="http://schemas.openxmlformats.org/drawingml/2006/main" prst="rect">
+            <a:avLst/>
+          </a:prstGeom>
+          <a:noFill xmlns:a="http://schemas.openxmlformats.org/drawingml/2006/main"/>
+          <a:ln xmlns:a="http://schemas.openxmlformats.org/drawingml/2006/main" w="0">
+            <a:noFill/>
+          </a:ln>
+        </p:spPr>
+        <p:txBody>
+          <a:bodyPr xmlns:a="http://schemas.openxmlformats.org/drawingml/2006/main">
+            <a:noAutofit/>
+          </a:bodyPr>
+          <a:lstStyle xmlns:a="http://schemas.openxmlformats.org/drawingml/2006/main"/>
+          <a:p xmlns:a="http://schemas.openxmlformats.org/drawingml/2006/main">
+            <a:pPr algn="l">
+              <a:defRPr sz="2160" b="1">
+                <a:solidFill>
+                  <a:srgbClr val="263442"/>
+                </a:solidFill>
+                <a:latin typeface="Arial"/>
+                <a:ea typeface="Arial"/>
+                <a:cs typeface="Arial"/>
+              </a:defRPr>
+            </a:pPr>
+            <a:r>
+              <a:rPr sz="2160" b="1">
+                <a:solidFill>
+                  <a:srgbClr val="263442"/>
+                </a:solidFill>
+                <a:latin typeface="Arial"/>
+                <a:ea typeface="Arial"/>
+                <a:cs typeface="Arial"/>
+              </a:rPr>
+              <a:t>09:00–10:30</a:t>
+            </a:r>
+          </a:p>
+        </p:txBody>
+      </p:sp>
+      <p:sp>
+        <p:nvSpPr>
+          <p:cNvPr id="9" name="">
+            <a:extLst xmlns:a="http://schemas.openxmlformats.org/drawingml/2006/main">
+              <a:ext uri="{FF2B5EF4-FFF2-40B4-BE49-F238E27FC236}">
+                <a16:creationId xmlns:a16="http://schemas.microsoft.com/office/drawing/2014/main" id="{D1271E40-94A0-44F9-94DA-E1CAD5B34850}"/>
+              </a:ext>
+            </a:extLst>
+          </p:cNvPr>
+          <p:cNvSpPr>
+            <a:spLocks xmlns:a="http://schemas.openxmlformats.org/drawingml/2006/main" noGrp="1"/>
+          </p:cNvSpPr>
+          <p:nvPr/>
+        </p:nvSpPr>
+        <p:spPr>
+          <a:xfrm xmlns:a="http://schemas.openxmlformats.org/drawingml/2006/main">
+            <a:off x="804672" y="2944368"/>
+            <a:ext cx="2743200" cy="457200"/>
+          </a:xfrm>
+          <a:prstGeom xmlns:a="http://schemas.openxmlformats.org/drawingml/2006/main" prst="rect">
+            <a:avLst/>
+          </a:prstGeom>
+          <a:noFill xmlns:a="http://schemas.openxmlformats.org/drawingml/2006/main"/>
+          <a:ln xmlns:a="http://schemas.openxmlformats.org/drawingml/2006/main" w="0">
+            <a:noFill/>
+          </a:ln>
+        </p:spPr>
+        <p:txBody>
+          <a:bodyPr xmlns:a="http://schemas.openxmlformats.org/drawingml/2006/main">
+            <a:noAutofit/>
+          </a:bodyPr>
+          <a:lstStyle xmlns:a="http://schemas.openxmlformats.org/drawingml/2006/main"/>
+          <a:p xmlns:a="http://schemas.openxmlformats.org/drawingml/2006/main">
+            <a:pPr algn="l">
+              <a:defRPr sz="2016" b="1">
                 <a:solidFill>
                   <a:srgbClr val="70436F"/>
                 </a:solidFill>
-                <a:latin typeface="Consolas"/>
-                <a:ea typeface="Consolas"/>
-                <a:cs typeface="Consolas"/>
-              </a:defRPr>
-            </a:pPr>
-            <a:r>
-              <a:rPr sz="2376" b="1">
+                <a:latin typeface="Arial"/>
+                <a:ea typeface="Arial"/>
+                <a:cs typeface="Arial"/>
+              </a:defRPr>
+            </a:pPr>
+            <a:r>
+              <a:rPr sz="2016" b="1">
                 <a:solidFill>
                   <a:srgbClr val="70436F"/>
                 </a:solidFill>
-                <a:latin typeface="Consolas"/>
-                <a:ea typeface="Consolas"/>
-                <a:cs typeface="Consolas"/>
-              </a:rPr>
-              <a:t>Una respuesta: .      Otra respuesta: ;</a:t>
-            </a:r>
-          </a:p>
-        </p:txBody>
-      </p:sp>
-      <p:sp>
-        <p:nvSpPr>
-          <p:cNvPr id="9" name="">
-            <a:extLst xmlns:a="http://schemas.openxmlformats.org/drawingml/2006/main">
-              <a:ext uri="{FF2B5EF4-FFF2-40B4-BE49-F238E27FC236}">
-                <a16:creationId xmlns:a16="http://schemas.microsoft.com/office/drawing/2014/main" id="{49F73912-5525-4536-8889-AD6BA44C8393}"/>
-              </a:ext>
-            </a:extLst>
-          </p:cNvPr>
-          <p:cNvSpPr>
-            <a:spLocks xmlns:a="http://schemas.openxmlformats.org/drawingml/2006/main" noGrp="1"/>
-          </p:cNvSpPr>
-          <p:nvPr/>
-        </p:nvSpPr>
-        <p:spPr>
-          <a:xfrm xmlns:a="http://schemas.openxmlformats.org/drawingml/2006/main">
-            <a:off x="822960" y="6089904"/>
-            <a:ext cx="10149840" cy="173736"/>
-          </a:xfrm>
-          <a:prstGeom xmlns:a="http://schemas.openxmlformats.org/drawingml/2006/main" prst="rect">
-            <a:avLst/>
-          </a:prstGeom>
-          <a:noFill xmlns:a="http://schemas.openxmlformats.org/drawingml/2006/main"/>
-          <a:ln xmlns:a="http://schemas.openxmlformats.org/drawingml/2006/main" w="0">
-            <a:noFill/>
-          </a:ln>
-        </p:spPr>
-        <p:txBody>
-          <a:bodyPr xmlns:a="http://schemas.openxmlformats.org/drawingml/2006/main">
-            <a:noAutofit/>
-          </a:bodyPr>
-          <a:lstStyle xmlns:a="http://schemas.openxmlformats.org/drawingml/2006/main"/>
-          <a:p xmlns:a="http://schemas.openxmlformats.org/drawingml/2006/main">
-            <a:pPr algn="l">
-              <a:defRPr sz="864" b="0">
-                <a:solidFill>
-                  <a:srgbClr val="60707B"/>
-                </a:solidFill>
-                <a:latin typeface="Arial"/>
-                <a:ea typeface="Arial"/>
-                <a:cs typeface="Arial"/>
-              </a:defRPr>
-            </a:pPr>
-            <a:r>
-              <a:rPr sz="864" b="0">
-                <a:solidFill>
-                  <a:srgbClr val="60707B"/>
-                </a:solidFill>
-                <a:latin typeface="Arial"/>
-                <a:ea typeface="Arial"/>
-                <a:cs typeface="Arial"/>
-              </a:rPr>
-              <a:t>Material de clase: natural · Programación lógica e inteligencia artificial · Primeros pasos II · Manual de SWI-Prolog.</a:t>
+                <a:latin typeface="Arial"/>
+                <a:ea typeface="Arial"/>
+                <a:cs typeface="Arial"/>
+              </a:rPr>
+              <a:t>Jueves</a:t>
+            </a:r>
+          </a:p>
+        </p:txBody>
+      </p:sp>
+      <p:sp>
+        <p:nvSpPr>
+          <p:cNvPr id="10" name="">
+            <a:extLst xmlns:a="http://schemas.openxmlformats.org/drawingml/2006/main">
+              <a:ext uri="{FF2B5EF4-FFF2-40B4-BE49-F238E27FC236}">
+                <a16:creationId xmlns:a16="http://schemas.microsoft.com/office/drawing/2014/main" id="{76B2AFD7-D6E6-4024-A475-CF8CBC8EA5F6}"/>
+              </a:ext>
+            </a:extLst>
+          </p:cNvPr>
+          <p:cNvSpPr>
+            <a:spLocks xmlns:a="http://schemas.openxmlformats.org/drawingml/2006/main" noGrp="1"/>
+          </p:cNvSpPr>
+          <p:nvPr/>
+        </p:nvSpPr>
+        <p:spPr>
+          <a:xfrm xmlns:a="http://schemas.openxmlformats.org/drawingml/2006/main">
+            <a:off x="4297680" y="2944368"/>
+            <a:ext cx="5029200" cy="457200"/>
+          </a:xfrm>
+          <a:prstGeom xmlns:a="http://schemas.openxmlformats.org/drawingml/2006/main" prst="rect">
+            <a:avLst/>
+          </a:prstGeom>
+          <a:noFill xmlns:a="http://schemas.openxmlformats.org/drawingml/2006/main"/>
+          <a:ln xmlns:a="http://schemas.openxmlformats.org/drawingml/2006/main" w="0">
+            <a:noFill/>
+          </a:ln>
+        </p:spPr>
+        <p:txBody>
+          <a:bodyPr xmlns:a="http://schemas.openxmlformats.org/drawingml/2006/main">
+            <a:noAutofit/>
+          </a:bodyPr>
+          <a:lstStyle xmlns:a="http://schemas.openxmlformats.org/drawingml/2006/main"/>
+          <a:p xmlns:a="http://schemas.openxmlformats.org/drawingml/2006/main">
+            <a:pPr algn="l">
+              <a:defRPr sz="2160" b="1">
+                <a:solidFill>
+                  <a:srgbClr val="263442"/>
+                </a:solidFill>
+                <a:latin typeface="Arial"/>
+                <a:ea typeface="Arial"/>
+                <a:cs typeface="Arial"/>
+              </a:defRPr>
+            </a:pPr>
+            <a:r>
+              <a:rPr sz="2160" b="1">
+                <a:solidFill>
+                  <a:srgbClr val="263442"/>
+                </a:solidFill>
+                <a:latin typeface="Arial"/>
+                <a:ea typeface="Arial"/>
+                <a:cs typeface="Arial"/>
+              </a:rPr>
+              <a:t>15:00–16:30</a:t>
+            </a:r>
+          </a:p>
+        </p:txBody>
+      </p:sp>
+      <p:sp>
+        <p:nvSpPr>
+          <p:cNvPr id="11" name="">
+            <a:extLst xmlns:a="http://schemas.openxmlformats.org/drawingml/2006/main">
+              <a:ext uri="{FF2B5EF4-FFF2-40B4-BE49-F238E27FC236}">
+                <a16:creationId xmlns:a16="http://schemas.microsoft.com/office/drawing/2014/main" id="{FDE15732-0CEC-4149-ADFE-C66B21EB90C4}"/>
+              </a:ext>
+            </a:extLst>
+          </p:cNvPr>
+          <p:cNvSpPr>
+            <a:spLocks xmlns:a="http://schemas.openxmlformats.org/drawingml/2006/main" noGrp="1"/>
+          </p:cNvSpPr>
+          <p:nvPr/>
+        </p:nvSpPr>
+        <p:spPr>
+          <a:xfrm xmlns:a="http://schemas.openxmlformats.org/drawingml/2006/main">
+            <a:off x="804672" y="4297680"/>
+            <a:ext cx="9966960" cy="493776"/>
+          </a:xfrm>
+          <a:prstGeom xmlns:a="http://schemas.openxmlformats.org/drawingml/2006/main" prst="rect">
+            <a:avLst/>
+          </a:prstGeom>
+          <a:noFill xmlns:a="http://schemas.openxmlformats.org/drawingml/2006/main"/>
+          <a:ln xmlns:a="http://schemas.openxmlformats.org/drawingml/2006/main" w="0">
+            <a:noFill/>
+          </a:ln>
+        </p:spPr>
+        <p:txBody>
+          <a:bodyPr xmlns:a="http://schemas.openxmlformats.org/drawingml/2006/main">
+            <a:noAutofit/>
+          </a:bodyPr>
+          <a:lstStyle xmlns:a="http://schemas.openxmlformats.org/drawingml/2006/main"/>
+          <a:p xmlns:a="http://schemas.openxmlformats.org/drawingml/2006/main">
+            <a:pPr algn="l">
+              <a:defRPr sz="1944" b="0">
+                <a:solidFill>
+                  <a:srgbClr val="263442"/>
+                </a:solidFill>
+                <a:latin typeface="Arial"/>
+                <a:ea typeface="Arial"/>
+                <a:cs typeface="Arial"/>
+              </a:defRPr>
+            </a:pPr>
+            <a:r>
+              <a:rPr sz="1944" b="0">
+                <a:solidFill>
+                  <a:srgbClr val="263442"/>
+                </a:solidFill>
+                <a:latin typeface="Arial"/>
+                <a:ea typeface="Arial"/>
+                <a:cs typeface="Arial"/>
+              </a:rPr>
+              <a:t>Laboratorio de Ciencia Computacional</a:t>
+            </a:r>
+          </a:p>
+        </p:txBody>
+      </p:sp>
+      <p:sp>
+        <p:nvSpPr>
+          <p:cNvPr id="12" name="">
+            <a:extLst xmlns:a="http://schemas.openxmlformats.org/drawingml/2006/main">
+              <a:ext uri="{FF2B5EF4-FFF2-40B4-BE49-F238E27FC236}">
+                <a16:creationId xmlns:a16="http://schemas.microsoft.com/office/drawing/2014/main" id="{6B2C3566-A45B-4621-8672-041B3D85548E}"/>
+              </a:ext>
+            </a:extLst>
+          </p:cNvPr>
+          <p:cNvSpPr>
+            <a:spLocks xmlns:a="http://schemas.openxmlformats.org/drawingml/2006/main" noGrp="1"/>
+          </p:cNvSpPr>
+          <p:nvPr/>
+        </p:nvSpPr>
+        <p:spPr>
+          <a:xfrm xmlns:a="http://schemas.openxmlformats.org/drawingml/2006/main">
+            <a:off x="804672" y="5138928"/>
+            <a:ext cx="9966960" cy="493776"/>
+          </a:xfrm>
+          <a:prstGeom xmlns:a="http://schemas.openxmlformats.org/drawingml/2006/main" prst="rect">
+            <a:avLst/>
+          </a:prstGeom>
+          <a:noFill xmlns:a="http://schemas.openxmlformats.org/drawingml/2006/main"/>
+          <a:ln xmlns:a="http://schemas.openxmlformats.org/drawingml/2006/main" w="0">
+            <a:noFill/>
+          </a:ln>
+        </p:spPr>
+        <p:txBody>
+          <a:bodyPr xmlns:a="http://schemas.openxmlformats.org/drawingml/2006/main">
+            <a:noAutofit/>
+          </a:bodyPr>
+          <a:lstStyle xmlns:a="http://schemas.openxmlformats.org/drawingml/2006/main"/>
+          <a:p xmlns:a="http://schemas.openxmlformats.org/drawingml/2006/main">
+            <a:pPr algn="l">
+              <a:defRPr sz="1872" b="1">
+                <a:solidFill>
+                  <a:srgbClr val="70436F"/>
+                </a:solidFill>
+                <a:latin typeface="Arial"/>
+                <a:ea typeface="Arial"/>
+                <a:cs typeface="Arial"/>
+              </a:defRPr>
+            </a:pPr>
+            <a:r>
+              <a:rPr sz="1872" b="1">
+                <a:solidFill>
+                  <a:srgbClr val="70436F"/>
+                </a:solidFill>
+                <a:latin typeface="Arial"/>
+                <a:ea typeface="Arial"/>
+                <a:cs typeface="Arial"/>
+              </a:rPr>
+              <a:t>3 horas concertadas · erik.figueiral.alonso@uvigo.gal</a:t>
             </a:r>
           </a:p>
         </p:txBody>
@@ -30726,7 +30682,7 @@
     </p:spTree>
     <p:extLst>
       <p:ext uri="{BB962C8B-B14F-4D97-AF65-F5344CB8AC3E}">
-        <p14:creationId xmlns:p14="http://schemas.microsoft.com/office/powerpoint/2010/main" val="1273247336"/>
+        <p14:creationId xmlns:p14="http://schemas.microsoft.com/office/powerpoint/2010/main" val="1636389764"/>
       </p:ext>
     </p:extLst>
   </p:cSld>
@@ -31035,7 +30991,7 @@
                 <a:ea typeface="Arial"/>
                 <a:cs typeface="Arial"/>
               </a:rPr>
-              <a:t>5</a:t>
+              <a:t>6</a:t>
             </a:r>
           </a:p>
         </p:txBody>
@@ -31891,7 +31847,7 @@
                 <a:ea typeface="Arial"/>
                 <a:cs typeface="Arial"/>
               </a:rPr>
-              <a:t>6</a:t>
+              <a:t>7</a:t>
             </a:r>
           </a:p>
         </p:txBody>
@@ -32827,7 +32783,7 @@
                 <a:ea typeface="Arial"/>
                 <a:cs typeface="Arial"/>
               </a:rPr>
-              <a:t>7</a:t>
+              <a:t>8</a:t>
             </a:r>
           </a:p>
         </p:txBody>
@@ -33649,7 +33605,7 @@
                 <a:ea typeface="Arial"/>
                 <a:cs typeface="Arial"/>
               </a:rPr>
-              <a:t>8</a:t>
+              <a:t>9</a:t>
             </a:r>
           </a:p>
         </p:txBody>
@@ -34439,7 +34395,7 @@
                 <a:ea typeface="Arial"/>
                 <a:cs typeface="Arial"/>
               </a:rPr>
-              <a:t>9</a:t>
+              <a:t>10</a:t>
             </a:r>
           </a:p>
         </p:txBody>

--- a/26/Lógica Computacional/LAB1/LAB1_Introduccion_a_Prolog.pptx
+++ b/26/Lógica Computacional/LAB1/LAB1_Introduccion_a_Prolog.pptx
@@ -4,9 +4,6 @@
   <p:sldMasterIdLst>
     <p:sldMasterId xmlns:r="http://schemas.openxmlformats.org/officeDocument/2006/relationships" id="2147483648" r:id="R65c818a370264531"/>
   </p:sldMasterIdLst>
-  <p:notesMasterIdLst>
-    <p:notesMasterId xmlns:r="http://schemas.openxmlformats.org/officeDocument/2006/relationships" r:id="R9a8290136a12463b"/>
-  </p:notesMasterIdLst>
   <p:sldIdLst>
     <p:sldId xmlns:r="http://schemas.openxmlformats.org/officeDocument/2006/relationships" id="256" r:id="R7659403b494c4aa4"/>
     <p:sldId xmlns:r="http://schemas.openxmlformats.org/officeDocument/2006/relationships" id="295" r:id="Ra4df9922c4234bd3"/>
@@ -52,3193 +49,6 @@
   <p:sldSz cx="11704320" cy="6583680"/>
   <p:notesSz cx="6858000" cy="9144000"/>
 </p:presentation>
-</file>
-
-<file path=ppt/notesMasters/notesMaster1.xml><?xml version="1.0" encoding="utf-8"?>
-<p:notesMaster xmlns:p="http://schemas.openxmlformats.org/presentationml/2006/main">
-  <p:cSld>
-    <p:bg>
-      <p:bgRef idx="1001">
-        <a:schemeClr xmlns:a="http://schemas.openxmlformats.org/drawingml/2006/main" val="bg1"/>
-      </p:bgRef>
-    </p:bg>
-    <p:spTree>
-      <p:nvGrpSpPr>
-        <p:cNvPr id="1" name=""/>
-        <p:cNvGrpSpPr/>
-        <p:nvPr/>
-      </p:nvGrpSpPr>
-      <p:grpSpPr>
-        <a:xfrm xmlns:a="http://schemas.openxmlformats.org/drawingml/2006/main"/>
-      </p:grpSpPr>
-      <p:sp>
-        <p:nvSpPr>
-          <p:cNvPr id="2" name="Header Placeholder"/>
-          <p:cNvSpPr/>
-          <p:nvPr>
-            <p:ph type="hdr" sz="quarter"/>
-          </p:nvPr>
-        </p:nvSpPr>
-        <p:spPr>
-          <a:prstGeom xmlns:a="http://schemas.openxmlformats.org/drawingml/2006/main" prst="rect">
-            <a:avLst/>
-          </a:prstGeom>
-        </p:spPr>
-        <p:txBody>
-          <a:bodyPr xmlns:a="http://schemas.openxmlformats.org/drawingml/2006/main"/>
-          <a:lstStyle xmlns:a="http://schemas.openxmlformats.org/drawingml/2006/main"/>
-          <a:p xmlns:a="http://schemas.openxmlformats.org/drawingml/2006/main"/>
-        </p:txBody>
-      </p:sp>
-      <p:sp>
-        <p:nvSpPr>
-          <p:cNvPr id="3" name="Date Placeholder"/>
-          <p:cNvSpPr/>
-          <p:nvPr>
-            <p:ph type="dt" sz="quarter" idx="1"/>
-          </p:nvPr>
-        </p:nvSpPr>
-        <p:spPr>
-          <a:prstGeom xmlns:a="http://schemas.openxmlformats.org/drawingml/2006/main" prst="rect">
-            <a:avLst/>
-          </a:prstGeom>
-        </p:spPr>
-        <p:txBody>
-          <a:bodyPr xmlns:a="http://schemas.openxmlformats.org/drawingml/2006/main"/>
-          <a:lstStyle xmlns:a="http://schemas.openxmlformats.org/drawingml/2006/main"/>
-          <a:p xmlns:a="http://schemas.openxmlformats.org/drawingml/2006/main"/>
-        </p:txBody>
-      </p:sp>
-      <p:sp>
-        <p:nvSpPr>
-          <p:cNvPr id="4" name="Slide Image Placeholder"/>
-          <p:cNvSpPr/>
-          <p:nvPr>
-            <p:ph type="sldImg" idx="2"/>
-          </p:nvPr>
-        </p:nvSpPr>
-        <p:spPr>
-          <a:prstGeom xmlns:a="http://schemas.openxmlformats.org/drawingml/2006/main" prst="rect">
-            <a:avLst/>
-          </a:prstGeom>
-        </p:spPr>
-        <p:txBody>
-          <a:bodyPr xmlns:a="http://schemas.openxmlformats.org/drawingml/2006/main"/>
-          <a:lstStyle xmlns:a="http://schemas.openxmlformats.org/drawingml/2006/main"/>
-          <a:p xmlns:a="http://schemas.openxmlformats.org/drawingml/2006/main"/>
-        </p:txBody>
-      </p:sp>
-      <p:sp>
-        <p:nvSpPr>
-          <p:cNvPr id="5" name="Notes Placeholder"/>
-          <p:cNvSpPr/>
-          <p:nvPr>
-            <p:ph type="body" sz="quarter" idx="3"/>
-          </p:nvPr>
-        </p:nvSpPr>
-        <p:spPr>
-          <a:prstGeom xmlns:a="http://schemas.openxmlformats.org/drawingml/2006/main" prst="rect">
-            <a:avLst/>
-          </a:prstGeom>
-        </p:spPr>
-        <p:txBody>
-          <a:bodyPr xmlns:a="http://schemas.openxmlformats.org/drawingml/2006/main"/>
-          <a:lstStyle xmlns:a="http://schemas.openxmlformats.org/drawingml/2006/main"/>
-          <a:p xmlns:a="http://schemas.openxmlformats.org/drawingml/2006/main"/>
-        </p:txBody>
-      </p:sp>
-      <p:sp>
-        <p:nvSpPr>
-          <p:cNvPr id="6" name="Footer Placeholder"/>
-          <p:cNvSpPr/>
-          <p:nvPr>
-            <p:ph type="ftr" sz="quarter" idx="4"/>
-          </p:nvPr>
-        </p:nvSpPr>
-        <p:spPr>
-          <a:prstGeom xmlns:a="http://schemas.openxmlformats.org/drawingml/2006/main" prst="rect">
-            <a:avLst/>
-          </a:prstGeom>
-        </p:spPr>
-        <p:txBody>
-          <a:bodyPr xmlns:a="http://schemas.openxmlformats.org/drawingml/2006/main"/>
-          <a:lstStyle xmlns:a="http://schemas.openxmlformats.org/drawingml/2006/main"/>
-          <a:p xmlns:a="http://schemas.openxmlformats.org/drawingml/2006/main"/>
-        </p:txBody>
-      </p:sp>
-      <p:sp>
-        <p:nvSpPr>
-          <p:cNvPr id="7" name="Slide Number Placeholder"/>
-          <p:cNvSpPr/>
-          <p:nvPr>
-            <p:ph type="sldNum" sz="quarter" idx="5"/>
-          </p:nvPr>
-        </p:nvSpPr>
-        <p:spPr>
-          <a:prstGeom xmlns:a="http://schemas.openxmlformats.org/drawingml/2006/main" prst="rect">
-            <a:avLst/>
-          </a:prstGeom>
-        </p:spPr>
-        <p:txBody>
-          <a:bodyPr xmlns:a="http://schemas.openxmlformats.org/drawingml/2006/main"/>
-          <a:lstStyle xmlns:a="http://schemas.openxmlformats.org/drawingml/2006/main"/>
-          <a:p xmlns:a="http://schemas.openxmlformats.org/drawingml/2006/main"/>
-        </p:txBody>
-      </p:sp>
-    </p:spTree>
-  </p:cSld>
-  <p:clrMap bg1="lt1" tx1="dk1" bg2="lt2" tx2="dk2" accent1="accent1" accent2="accent2" accent3="accent3" accent4="accent4" accent5="accent5" accent6="accent6" hlink="hlink" folHlink="folHlink"/>
-  <p:notesStyle>
-    <a:lvl1pPr xmlns:a="http://schemas.openxmlformats.org/drawingml/2006/main" marL="0" algn="l" defTabSz="914400" rtl="0" eaLnBrk="1" latinLnBrk="0" hangingPunct="1">
-      <a:defRPr sz="1200" kern="1200"/>
-    </a:lvl1pPr>
-  </p:notesStyle>
-</p:notesMaster>
-</file>
-
-<file path=ppt/notesMasters/theme/theme3.xml><?xml version="1.0" encoding="utf-8"?>
-<a:theme xmlns:a="http://schemas.openxmlformats.org/drawingml/2006/main" name="ChatGPT">
-  <a:themeElements>
-    <a:clrScheme name="ChatGPT">
-      <a:dk1>
-        <a:srgbClr val="000000"/>
-      </a:dk1>
-      <a:lt1>
-        <a:srgbClr val="FFFFFF"/>
-      </a:lt1>
-      <a:dk2>
-        <a:srgbClr val="0E2841"/>
-      </a:dk2>
-      <a:lt2>
-        <a:srgbClr val="E8E8E8"/>
-      </a:lt2>
-      <a:accent1>
-        <a:srgbClr val="156082"/>
-      </a:accent1>
-      <a:accent2>
-        <a:srgbClr val="E97132"/>
-      </a:accent2>
-      <a:accent3>
-        <a:srgbClr val="196B24"/>
-      </a:accent3>
-      <a:accent4>
-        <a:srgbClr val="0F9ED5"/>
-      </a:accent4>
-      <a:accent5>
-        <a:srgbClr val="A02B93"/>
-      </a:accent5>
-      <a:accent6>
-        <a:srgbClr val="4EA72E"/>
-      </a:accent6>
-      <a:hlink>
-        <a:srgbClr val="467886"/>
-      </a:hlink>
-      <a:folHlink>
-        <a:srgbClr val="96607D"/>
-      </a:folHlink>
-    </a:clrScheme>
-    <a:fontScheme name="Office">
-      <a:majorFont>
-        <a:latin typeface="Calibri Light"/>
-        <a:ea typeface="Calibri Light"/>
-        <a:cs typeface="Calibri Light"/>
-      </a:majorFont>
-      <a:minorFont>
-        <a:latin typeface="Calibri"/>
-        <a:ea typeface="Calibri"/>
-        <a:cs typeface="Calibri"/>
-      </a:minorFont>
-    </a:fontScheme>
-    <a:fmtScheme name="ChatGPT">
-      <a:fillStyleLst>
-        <a:solidFill>
-          <a:schemeClr val="phClr"/>
-        </a:solidFill>
-        <a:gradFill>
-          <a:gsLst>
-            <a:gs pos="0">
-              <a:schemeClr val="phClr">
-                <a:tint val="67000"/>
-                <a:lumMod val="110000"/>
-                <a:satMod val="105000"/>
-              </a:schemeClr>
-            </a:gs>
-            <a:gs pos="50000">
-              <a:schemeClr val="phClr">
-                <a:tint val="73000"/>
-                <a:lumMod val="105000"/>
-                <a:satMod val="103000"/>
-              </a:schemeClr>
-            </a:gs>
-            <a:gs pos="100000">
-              <a:schemeClr val="phClr">
-                <a:tint val="81000"/>
-                <a:lumMod val="105000"/>
-                <a:satMod val="109000"/>
-              </a:schemeClr>
-            </a:gs>
-          </a:gsLst>
-          <a:lin ang="5400000" scaled="0"/>
-        </a:gradFill>
-        <a:gradFill>
-          <a:gsLst>
-            <a:gs pos="0">
-              <a:schemeClr val="phClr">
-                <a:tint val="94000"/>
-                <a:lumMod val="102000"/>
-                <a:satMod val="103000"/>
-              </a:schemeClr>
-            </a:gs>
-            <a:gs pos="50000">
-              <a:schemeClr val="phClr">
-                <a:shade val="100000"/>
-                <a:lumMod val="100000"/>
-                <a:satMod val="110000"/>
-              </a:schemeClr>
-            </a:gs>
-            <a:gs pos="100000">
-              <a:schemeClr val="phClr">
-                <a:shade val="78000"/>
-                <a:lumMod val="99000"/>
-                <a:satMod val="120000"/>
-              </a:schemeClr>
-            </a:gs>
-          </a:gsLst>
-          <a:lin ang="5400000" scaled="0"/>
-        </a:gradFill>
-      </a:fillStyleLst>
-      <a:lnStyleLst>
-        <a:ln w="12700">
-          <a:solidFill>
-            <a:schemeClr val="phClr"/>
-          </a:solidFill>
-          <a:prstDash val="solid"/>
-        </a:ln>
-        <a:ln w="19050">
-          <a:solidFill>
-            <a:schemeClr val="phClr"/>
-          </a:solidFill>
-          <a:prstDash val="solid"/>
-        </a:ln>
-        <a:ln w="25400">
-          <a:solidFill>
-            <a:schemeClr val="phClr"/>
-          </a:solidFill>
-          <a:prstDash val="solid"/>
-        </a:ln>
-      </a:lnStyleLst>
-      <a:effectStyleLst>
-        <a:effectStyle>
-          <a:effectLst/>
-        </a:effectStyle>
-        <a:effectStyle>
-          <a:effectLst/>
-        </a:effectStyle>
-        <a:effectStyle>
-          <a:effectLst>
-            <a:outerShdw blurRad="57150" dist="19050" dir="5400000">
-              <a:srgbClr val="000000">
-                <a:alpha val="16000"/>
-              </a:srgbClr>
-            </a:outerShdw>
-          </a:effectLst>
-        </a:effectStyle>
-        <a:effectStyle>
-          <a:effectLst>
-            <a:outerShdw blurRad="19050" dist="9525" dir="5400000">
-              <a:srgbClr val="000000">
-                <a:alpha val="6000"/>
-              </a:srgbClr>
-            </a:outerShdw>
-          </a:effectLst>
-        </a:effectStyle>
-        <a:effectStyle>
-          <a:effectLst>
-            <a:outerShdw blurRad="28575" dist="9525" dir="5400000">
-              <a:srgbClr val="000000">
-                <a:alpha val="8000"/>
-              </a:srgbClr>
-            </a:outerShdw>
-          </a:effectLst>
-        </a:effectStyle>
-        <a:effectStyle>
-          <a:effectLst>
-            <a:outerShdw blurRad="57150" dist="19050" dir="5400000">
-              <a:srgbClr val="000000">
-                <a:alpha val="10000"/>
-              </a:srgbClr>
-            </a:outerShdw>
-          </a:effectLst>
-        </a:effectStyle>
-        <a:effectStyle>
-          <a:effectLst>
-            <a:outerShdw blurRad="114300" dist="38100" dir="5400000">
-              <a:srgbClr val="000000">
-                <a:alpha val="12000"/>
-              </a:srgbClr>
-            </a:outerShdw>
-          </a:effectLst>
-        </a:effectStyle>
-        <a:effectStyle>
-          <a:effectLst>
-            <a:outerShdw blurRad="171450" dist="57150" dir="5400000">
-              <a:srgbClr val="000000">
-                <a:alpha val="16000"/>
-              </a:srgbClr>
-            </a:outerShdw>
-          </a:effectLst>
-        </a:effectStyle>
-        <a:effectStyle>
-          <a:effectLst>
-            <a:outerShdw blurRad="266700" dist="95250" dir="5400000">
-              <a:srgbClr val="000000">
-                <a:alpha val="24000"/>
-              </a:srgbClr>
-            </a:outerShdw>
-          </a:effectLst>
-        </a:effectStyle>
-      </a:effectStyleLst>
-      <a:bgFillStyleLst>
-        <a:solidFill>
-          <a:schemeClr val="phClr"/>
-        </a:solidFill>
-        <a:solidFill>
-          <a:schemeClr val="phClr">
-            <a:tint val="95000"/>
-            <a:satMod val="170000"/>
-          </a:schemeClr>
-        </a:solidFill>
-        <a:gradFill>
-          <a:gsLst>
-            <a:gs pos="0">
-              <a:schemeClr val="phClr">
-                <a:tint val="93000"/>
-                <a:shade val="98000"/>
-                <a:lumMod val="102000"/>
-                <a:satMod val="150000"/>
-              </a:schemeClr>
-            </a:gs>
-            <a:gs pos="50000">
-              <a:schemeClr val="phClr">
-                <a:tint val="98000"/>
-                <a:shade val="90000"/>
-                <a:lumMod val="103000"/>
-                <a:satMod val="130000"/>
-              </a:schemeClr>
-            </a:gs>
-            <a:gs pos="100000">
-              <a:schemeClr val="phClr">
-                <a:shade val="63000"/>
-                <a:satMod val="120000"/>
-              </a:schemeClr>
-            </a:gs>
-          </a:gsLst>
-          <a:lin ang="5400000" scaled="0"/>
-        </a:gradFill>
-      </a:bgFillStyleLst>
-    </a:fmtScheme>
-  </a:themeElements>
-</a:theme>
-</file>
-
-<file path=ppt/notesSlides/notesSlide1.xml><?xml version="1.0" encoding="utf-8"?>
-<ns0:notes xmlns:ns0="http://schemas.openxmlformats.org/presentationml/2006/main" xmlns:ns1="http://schemas.openxmlformats.org/drawingml/2006/main">
-  <ns0:cSld>
-    <ns0:spTree>
-      <ns0:nvGrpSpPr>
-        <ns0:cNvPr id="1" name=""/>
-        <ns0:cNvGrpSpPr/>
-        <ns0:nvPr/>
-      </ns0:nvGrpSpPr>
-      <ns0:grpSpPr>
-        <ns1:xfrm/>
-      </ns0:grpSpPr>
-      <ns0:sp>
-        <ns0:nvSpPr>
-          <ns0:cNvPr id="2" name="Slide Image Placeholder 1"/>
-          <ns0:cNvSpPr>
-            <ns1:spLocks noGrp="1"/>
-          </ns0:cNvSpPr>
-          <ns0:nvPr>
-            <ns0:ph type="sldImg" idx="0"/>
-          </ns0:nvPr>
-        </ns0:nvSpPr>
-        <ns0:spPr/>
-      </ns0:sp>
-      <ns0:sp>
-        <ns0:nvSpPr>
-          <ns0:cNvPr id="3" name="Notes Placeholder 2"/>
-          <ns0:cNvSpPr>
-            <ns1:spLocks noGrp="1"/>
-          </ns0:cNvSpPr>
-          <ns0:nvPr>
-            <ns0:ph type="body" idx="1"/>
-          </ns0:nvPr>
-        </ns0:nvSpPr>
-        <ns0:spPr/>
-        <ns0:txBody>
-          <ns1:bodyPr/>
-          <ns1:lstStyle/>
-          <ns1:p>
-            <ns1:r>
-              <ns1:t/>
-            </ns1:r>
-          </ns1:p>
-        </ns0:txBody>
-      </ns0:sp>
-      <ns0:sp>
-        <ns0:nvSpPr>
-          <ns0:cNvPr id="4" name="Slide Number Placeholder 3"/>
-          <ns0:cNvSpPr>
-            <ns1:spLocks noGrp="1"/>
-          </ns0:cNvSpPr>
-          <ns0:nvPr>
-            <ns0:ph type="sldNum" idx="5"/>
-          </ns0:nvPr>
-        </ns0:nvSpPr>
-        <ns0:spPr/>
-        <ns0:txBody>
-          <ns1:bodyPr/>
-          <ns1:lstStyle/>
-          <ns1:p/>
-        </ns0:txBody>
-      </ns0:sp>
-    </ns0:spTree>
-  </ns0:cSld>
-  <ns0:clrMapOvr>
-    <ns1:masterClrMapping/>
-  </ns0:clrMapOvr>
-</ns0:notes>
-</file>
-
-<file path=ppt/notesSlides/notesSlide10.xml><?xml version="1.0" encoding="utf-8"?>
-<ns0:notes xmlns:ns0="http://schemas.openxmlformats.org/presentationml/2006/main" xmlns:ns1="http://schemas.openxmlformats.org/drawingml/2006/main">
-  <ns0:cSld>
-    <ns0:spTree>
-      <ns0:nvGrpSpPr>
-        <ns0:cNvPr id="1" name=""/>
-        <ns0:cNvGrpSpPr/>
-        <ns0:nvPr/>
-      </ns0:nvGrpSpPr>
-      <ns0:grpSpPr>
-        <ns1:xfrm/>
-      </ns0:grpSpPr>
-      <ns0:sp>
-        <ns0:nvSpPr>
-          <ns0:cNvPr id="2" name="Slide Image Placeholder 1"/>
-          <ns0:cNvSpPr>
-            <ns1:spLocks noGrp="1"/>
-          </ns0:cNvSpPr>
-          <ns0:nvPr>
-            <ns0:ph type="sldImg" idx="0"/>
-          </ns0:nvPr>
-        </ns0:nvSpPr>
-        <ns0:spPr/>
-      </ns0:sp>
-      <ns0:sp>
-        <ns0:nvSpPr>
-          <ns0:cNvPr id="3" name="Notes Placeholder 2"/>
-          <ns0:cNvSpPr>
-            <ns1:spLocks noGrp="1"/>
-          </ns0:cNvSpPr>
-          <ns0:nvPr>
-            <ns0:ph type="body" idx="1"/>
-          </ns0:nvPr>
-        </ns0:nvSpPr>
-        <ns0:spPr/>
-        <ns0:txBody>
-          <ns1:bodyPr/>
-          <ns1:lstStyle/>
-          <ns1:p>
-            <ns1:r>
-              <ns1:t/>
-            </ns1:r>
-          </ns1:p>
-        </ns0:txBody>
-      </ns0:sp>
-      <ns0:sp>
-        <ns0:nvSpPr>
-          <ns0:cNvPr id="4" name="Slide Number Placeholder 3"/>
-          <ns0:cNvSpPr>
-            <ns1:spLocks noGrp="1"/>
-          </ns0:cNvSpPr>
-          <ns0:nvPr>
-            <ns0:ph type="sldNum" idx="5"/>
-          </ns0:nvPr>
-        </ns0:nvSpPr>
-        <ns0:spPr/>
-        <ns0:txBody>
-          <ns1:bodyPr/>
-          <ns1:lstStyle/>
-          <ns1:p/>
-        </ns0:txBody>
-      </ns0:sp>
-    </ns0:spTree>
-  </ns0:cSld>
-  <ns0:clrMapOvr>
-    <ns1:masterClrMapping/>
-  </ns0:clrMapOvr>
-</ns0:notes>
-</file>
-
-<file path=ppt/notesSlides/notesSlide11.xml><?xml version="1.0" encoding="utf-8"?>
-<ns0:notes xmlns:ns0="http://schemas.openxmlformats.org/presentationml/2006/main" xmlns:ns1="http://schemas.openxmlformats.org/drawingml/2006/main">
-  <ns0:cSld>
-    <ns0:spTree>
-      <ns0:nvGrpSpPr>
-        <ns0:cNvPr id="1" name=""/>
-        <ns0:cNvGrpSpPr/>
-        <ns0:nvPr/>
-      </ns0:nvGrpSpPr>
-      <ns0:grpSpPr>
-        <ns1:xfrm/>
-      </ns0:grpSpPr>
-      <ns0:sp>
-        <ns0:nvSpPr>
-          <ns0:cNvPr id="2" name="Slide Image Placeholder 1"/>
-          <ns0:cNvSpPr>
-            <ns1:spLocks noGrp="1"/>
-          </ns0:cNvSpPr>
-          <ns0:nvPr>
-            <ns0:ph type="sldImg" idx="0"/>
-          </ns0:nvPr>
-        </ns0:nvSpPr>
-        <ns0:spPr/>
-      </ns0:sp>
-      <ns0:sp>
-        <ns0:nvSpPr>
-          <ns0:cNvPr id="3" name="Notes Placeholder 2"/>
-          <ns0:cNvSpPr>
-            <ns1:spLocks noGrp="1"/>
-          </ns0:cNvSpPr>
-          <ns0:nvPr>
-            <ns0:ph type="body" idx="1"/>
-          </ns0:nvPr>
-        </ns0:nvSpPr>
-        <ns0:spPr/>
-        <ns0:txBody>
-          <ns1:bodyPr/>
-          <ns1:lstStyle/>
-          <ns1:p>
-            <ns1:r>
-              <ns1:t/>
-            </ns1:r>
-          </ns1:p>
-        </ns0:txBody>
-      </ns0:sp>
-      <ns0:sp>
-        <ns0:nvSpPr>
-          <ns0:cNvPr id="4" name="Slide Number Placeholder 3"/>
-          <ns0:cNvSpPr>
-            <ns1:spLocks noGrp="1"/>
-          </ns0:cNvSpPr>
-          <ns0:nvPr>
-            <ns0:ph type="sldNum" idx="5"/>
-          </ns0:nvPr>
-        </ns0:nvSpPr>
-        <ns0:spPr/>
-        <ns0:txBody>
-          <ns1:bodyPr/>
-          <ns1:lstStyle/>
-          <ns1:p/>
-        </ns0:txBody>
-      </ns0:sp>
-    </ns0:spTree>
-  </ns0:cSld>
-  <ns0:clrMapOvr>
-    <ns1:masterClrMapping/>
-  </ns0:clrMapOvr>
-</ns0:notes>
-</file>
-
-<file path=ppt/notesSlides/notesSlide12.xml><?xml version="1.0" encoding="utf-8"?>
-<ns0:notes xmlns:ns0="http://schemas.openxmlformats.org/presentationml/2006/main" xmlns:ns1="http://schemas.openxmlformats.org/drawingml/2006/main">
-  <ns0:cSld>
-    <ns0:spTree>
-      <ns0:nvGrpSpPr>
-        <ns0:cNvPr id="1" name=""/>
-        <ns0:cNvGrpSpPr/>
-        <ns0:nvPr/>
-      </ns0:nvGrpSpPr>
-      <ns0:grpSpPr>
-        <ns1:xfrm/>
-      </ns0:grpSpPr>
-      <ns0:sp>
-        <ns0:nvSpPr>
-          <ns0:cNvPr id="2" name="Slide Image Placeholder 1"/>
-          <ns0:cNvSpPr>
-            <ns1:spLocks noGrp="1"/>
-          </ns0:cNvSpPr>
-          <ns0:nvPr>
-            <ns0:ph type="sldImg" idx="0"/>
-          </ns0:nvPr>
-        </ns0:nvSpPr>
-        <ns0:spPr/>
-      </ns0:sp>
-      <ns0:sp>
-        <ns0:nvSpPr>
-          <ns0:cNvPr id="3" name="Notes Placeholder 2"/>
-          <ns0:cNvSpPr>
-            <ns1:spLocks noGrp="1"/>
-          </ns0:cNvSpPr>
-          <ns0:nvPr>
-            <ns0:ph type="body" idx="1"/>
-          </ns0:nvPr>
-        </ns0:nvSpPr>
-        <ns0:spPr/>
-        <ns0:txBody>
-          <ns1:bodyPr/>
-          <ns1:lstStyle/>
-          <ns1:p>
-            <ns1:r>
-              <ns1:t/>
-            </ns1:r>
-          </ns1:p>
-        </ns0:txBody>
-      </ns0:sp>
-      <ns0:sp>
-        <ns0:nvSpPr>
-          <ns0:cNvPr id="4" name="Slide Number Placeholder 3"/>
-          <ns0:cNvSpPr>
-            <ns1:spLocks noGrp="1"/>
-          </ns0:cNvSpPr>
-          <ns0:nvPr>
-            <ns0:ph type="sldNum" idx="5"/>
-          </ns0:nvPr>
-        </ns0:nvSpPr>
-        <ns0:spPr/>
-        <ns0:txBody>
-          <ns1:bodyPr/>
-          <ns1:lstStyle/>
-          <ns1:p/>
-        </ns0:txBody>
-      </ns0:sp>
-    </ns0:spTree>
-  </ns0:cSld>
-  <ns0:clrMapOvr>
-    <ns1:masterClrMapping/>
-  </ns0:clrMapOvr>
-</ns0:notes>
-</file>
-
-<file path=ppt/notesSlides/notesSlide13.xml><?xml version="1.0" encoding="utf-8"?>
-<ns0:notes xmlns:ns0="http://schemas.openxmlformats.org/presentationml/2006/main" xmlns:ns1="http://schemas.openxmlformats.org/drawingml/2006/main">
-  <ns0:cSld>
-    <ns0:spTree>
-      <ns0:nvGrpSpPr>
-        <ns0:cNvPr id="1" name=""/>
-        <ns0:cNvGrpSpPr/>
-        <ns0:nvPr/>
-      </ns0:nvGrpSpPr>
-      <ns0:grpSpPr>
-        <ns1:xfrm/>
-      </ns0:grpSpPr>
-      <ns0:sp>
-        <ns0:nvSpPr>
-          <ns0:cNvPr id="2" name="Slide Image Placeholder 1"/>
-          <ns0:cNvSpPr>
-            <ns1:spLocks noGrp="1"/>
-          </ns0:cNvSpPr>
-          <ns0:nvPr>
-            <ns0:ph type="sldImg" idx="0"/>
-          </ns0:nvPr>
-        </ns0:nvSpPr>
-        <ns0:spPr/>
-      </ns0:sp>
-      <ns0:sp>
-        <ns0:nvSpPr>
-          <ns0:cNvPr id="3" name="Notes Placeholder 2"/>
-          <ns0:cNvSpPr>
-            <ns1:spLocks noGrp="1"/>
-          </ns0:cNvSpPr>
-          <ns0:nvPr>
-            <ns0:ph type="body" idx="1"/>
-          </ns0:nvPr>
-        </ns0:nvSpPr>
-        <ns0:spPr/>
-        <ns0:txBody>
-          <ns1:bodyPr/>
-          <ns1:lstStyle/>
-          <ns1:p>
-            <ns1:r>
-              <ns1:t/>
-            </ns1:r>
-          </ns1:p>
-        </ns0:txBody>
-      </ns0:sp>
-      <ns0:sp>
-        <ns0:nvSpPr>
-          <ns0:cNvPr id="4" name="Slide Number Placeholder 3"/>
-          <ns0:cNvSpPr>
-            <ns1:spLocks noGrp="1"/>
-          </ns0:cNvSpPr>
-          <ns0:nvPr>
-            <ns0:ph type="sldNum" idx="5"/>
-          </ns0:nvPr>
-        </ns0:nvSpPr>
-        <ns0:spPr/>
-        <ns0:txBody>
-          <ns1:bodyPr/>
-          <ns1:lstStyle/>
-          <ns1:p/>
-        </ns0:txBody>
-      </ns0:sp>
-    </ns0:spTree>
-  </ns0:cSld>
-  <ns0:clrMapOvr>
-    <ns1:masterClrMapping/>
-  </ns0:clrMapOvr>
-</ns0:notes>
-</file>
-
-<file path=ppt/notesSlides/notesSlide14.xml><?xml version="1.0" encoding="utf-8"?>
-<ns0:notes xmlns:ns0="http://schemas.openxmlformats.org/presentationml/2006/main" xmlns:ns1="http://schemas.openxmlformats.org/drawingml/2006/main">
-  <ns0:cSld>
-    <ns0:spTree>
-      <ns0:nvGrpSpPr>
-        <ns0:cNvPr id="1" name=""/>
-        <ns0:cNvGrpSpPr/>
-        <ns0:nvPr/>
-      </ns0:nvGrpSpPr>
-      <ns0:grpSpPr>
-        <ns1:xfrm/>
-      </ns0:grpSpPr>
-      <ns0:sp>
-        <ns0:nvSpPr>
-          <ns0:cNvPr id="2" name="Slide Image Placeholder 1"/>
-          <ns0:cNvSpPr>
-            <ns1:spLocks noGrp="1"/>
-          </ns0:cNvSpPr>
-          <ns0:nvPr>
-            <ns0:ph type="sldImg" idx="0"/>
-          </ns0:nvPr>
-        </ns0:nvSpPr>
-        <ns0:spPr/>
-      </ns0:sp>
-      <ns0:sp>
-        <ns0:nvSpPr>
-          <ns0:cNvPr id="3" name="Notes Placeholder 2"/>
-          <ns0:cNvSpPr>
-            <ns1:spLocks noGrp="1"/>
-          </ns0:cNvSpPr>
-          <ns0:nvPr>
-            <ns0:ph type="body" idx="1"/>
-          </ns0:nvPr>
-        </ns0:nvSpPr>
-        <ns0:spPr/>
-        <ns0:txBody>
-          <ns1:bodyPr/>
-          <ns1:lstStyle/>
-          <ns1:p>
-            <ns1:r>
-              <ns1:t/>
-            </ns1:r>
-          </ns1:p>
-        </ns0:txBody>
-      </ns0:sp>
-      <ns0:sp>
-        <ns0:nvSpPr>
-          <ns0:cNvPr id="4" name="Slide Number Placeholder 3"/>
-          <ns0:cNvSpPr>
-            <ns1:spLocks noGrp="1"/>
-          </ns0:cNvSpPr>
-          <ns0:nvPr>
-            <ns0:ph type="sldNum" idx="5"/>
-          </ns0:nvPr>
-        </ns0:nvSpPr>
-        <ns0:spPr/>
-        <ns0:txBody>
-          <ns1:bodyPr/>
-          <ns1:lstStyle/>
-          <ns1:p/>
-        </ns0:txBody>
-      </ns0:sp>
-    </ns0:spTree>
-  </ns0:cSld>
-  <ns0:clrMapOvr>
-    <ns1:masterClrMapping/>
-  </ns0:clrMapOvr>
-</ns0:notes>
-</file>
-
-<file path=ppt/notesSlides/notesSlide15.xml><?xml version="1.0" encoding="utf-8"?>
-<ns0:notes xmlns:ns0="http://schemas.openxmlformats.org/presentationml/2006/main" xmlns:ns1="http://schemas.openxmlformats.org/drawingml/2006/main">
-  <ns0:cSld>
-    <ns0:spTree>
-      <ns0:nvGrpSpPr>
-        <ns0:cNvPr id="1" name=""/>
-        <ns0:cNvGrpSpPr/>
-        <ns0:nvPr/>
-      </ns0:nvGrpSpPr>
-      <ns0:grpSpPr>
-        <ns1:xfrm/>
-      </ns0:grpSpPr>
-      <ns0:sp>
-        <ns0:nvSpPr>
-          <ns0:cNvPr id="2" name="Slide Image Placeholder 1"/>
-          <ns0:cNvSpPr>
-            <ns1:spLocks noGrp="1"/>
-          </ns0:cNvSpPr>
-          <ns0:nvPr>
-            <ns0:ph type="sldImg" idx="0"/>
-          </ns0:nvPr>
-        </ns0:nvSpPr>
-        <ns0:spPr/>
-      </ns0:sp>
-      <ns0:sp>
-        <ns0:nvSpPr>
-          <ns0:cNvPr id="3" name="Notes Placeholder 2"/>
-          <ns0:cNvSpPr>
-            <ns1:spLocks noGrp="1"/>
-          </ns0:cNvSpPr>
-          <ns0:nvPr>
-            <ns0:ph type="body" idx="1"/>
-          </ns0:nvPr>
-        </ns0:nvSpPr>
-        <ns0:spPr/>
-        <ns0:txBody>
-          <ns1:bodyPr/>
-          <ns1:lstStyle/>
-          <ns1:p>
-            <ns1:r>
-              <ns1:t/>
-            </ns1:r>
-          </ns1:p>
-        </ns0:txBody>
-      </ns0:sp>
-      <ns0:sp>
-        <ns0:nvSpPr>
-          <ns0:cNvPr id="4" name="Slide Number Placeholder 3"/>
-          <ns0:cNvSpPr>
-            <ns1:spLocks noGrp="1"/>
-          </ns0:cNvSpPr>
-          <ns0:nvPr>
-            <ns0:ph type="sldNum" idx="5"/>
-          </ns0:nvPr>
-        </ns0:nvSpPr>
-        <ns0:spPr/>
-        <ns0:txBody>
-          <ns1:bodyPr/>
-          <ns1:lstStyle/>
-          <ns1:p/>
-        </ns0:txBody>
-      </ns0:sp>
-    </ns0:spTree>
-  </ns0:cSld>
-  <ns0:clrMapOvr>
-    <ns1:masterClrMapping/>
-  </ns0:clrMapOvr>
-</ns0:notes>
-</file>
-
-<file path=ppt/notesSlides/notesSlide16.xml><?xml version="1.0" encoding="utf-8"?>
-<ns0:notes xmlns:ns0="http://schemas.openxmlformats.org/presentationml/2006/main" xmlns:ns1="http://schemas.openxmlformats.org/drawingml/2006/main">
-  <ns0:cSld>
-    <ns0:spTree>
-      <ns0:nvGrpSpPr>
-        <ns0:cNvPr id="1" name=""/>
-        <ns0:cNvGrpSpPr/>
-        <ns0:nvPr/>
-      </ns0:nvGrpSpPr>
-      <ns0:grpSpPr>
-        <ns1:xfrm/>
-      </ns0:grpSpPr>
-      <ns0:sp>
-        <ns0:nvSpPr>
-          <ns0:cNvPr id="2" name="Slide Image Placeholder 1"/>
-          <ns0:cNvSpPr>
-            <ns1:spLocks noGrp="1"/>
-          </ns0:cNvSpPr>
-          <ns0:nvPr>
-            <ns0:ph type="sldImg" idx="0"/>
-          </ns0:nvPr>
-        </ns0:nvSpPr>
-        <ns0:spPr/>
-      </ns0:sp>
-      <ns0:sp>
-        <ns0:nvSpPr>
-          <ns0:cNvPr id="3" name="Notes Placeholder 2"/>
-          <ns0:cNvSpPr>
-            <ns1:spLocks noGrp="1"/>
-          </ns0:cNvSpPr>
-          <ns0:nvPr>
-            <ns0:ph type="body" idx="1"/>
-          </ns0:nvPr>
-        </ns0:nvSpPr>
-        <ns0:spPr/>
-        <ns0:txBody>
-          <ns1:bodyPr/>
-          <ns1:lstStyle/>
-          <ns1:p>
-            <ns1:r>
-              <ns1:t/>
-            </ns1:r>
-          </ns1:p>
-        </ns0:txBody>
-      </ns0:sp>
-      <ns0:sp>
-        <ns0:nvSpPr>
-          <ns0:cNvPr id="4" name="Slide Number Placeholder 3"/>
-          <ns0:cNvSpPr>
-            <ns1:spLocks noGrp="1"/>
-          </ns0:cNvSpPr>
-          <ns0:nvPr>
-            <ns0:ph type="sldNum" idx="5"/>
-          </ns0:nvPr>
-        </ns0:nvSpPr>
-        <ns0:spPr/>
-        <ns0:txBody>
-          <ns1:bodyPr/>
-          <ns1:lstStyle/>
-          <ns1:p/>
-        </ns0:txBody>
-      </ns0:sp>
-    </ns0:spTree>
-  </ns0:cSld>
-  <ns0:clrMapOvr>
-    <ns1:masterClrMapping/>
-  </ns0:clrMapOvr>
-</ns0:notes>
-</file>
-
-<file path=ppt/notesSlides/notesSlide17.xml><?xml version="1.0" encoding="utf-8"?>
-<ns0:notes xmlns:ns0="http://schemas.openxmlformats.org/presentationml/2006/main" xmlns:ns1="http://schemas.openxmlformats.org/drawingml/2006/main">
-  <ns0:cSld>
-    <ns0:spTree>
-      <ns0:nvGrpSpPr>
-        <ns0:cNvPr id="1" name=""/>
-        <ns0:cNvGrpSpPr/>
-        <ns0:nvPr/>
-      </ns0:nvGrpSpPr>
-      <ns0:grpSpPr>
-        <ns1:xfrm/>
-      </ns0:grpSpPr>
-      <ns0:sp>
-        <ns0:nvSpPr>
-          <ns0:cNvPr id="2" name="Slide Image Placeholder 1"/>
-          <ns0:cNvSpPr>
-            <ns1:spLocks noGrp="1"/>
-          </ns0:cNvSpPr>
-          <ns0:nvPr>
-            <ns0:ph type="sldImg" idx="0"/>
-          </ns0:nvPr>
-        </ns0:nvSpPr>
-        <ns0:spPr/>
-      </ns0:sp>
-      <ns0:sp>
-        <ns0:nvSpPr>
-          <ns0:cNvPr id="3" name="Notes Placeholder 2"/>
-          <ns0:cNvSpPr>
-            <ns1:spLocks noGrp="1"/>
-          </ns0:cNvSpPr>
-          <ns0:nvPr>
-            <ns0:ph type="body" idx="1"/>
-          </ns0:nvPr>
-        </ns0:nvSpPr>
-        <ns0:spPr/>
-        <ns0:txBody>
-          <ns1:bodyPr/>
-          <ns1:lstStyle/>
-          <ns1:p>
-            <ns1:r>
-              <ns1:t/>
-            </ns1:r>
-          </ns1:p>
-        </ns0:txBody>
-      </ns0:sp>
-      <ns0:sp>
-        <ns0:nvSpPr>
-          <ns0:cNvPr id="4" name="Slide Number Placeholder 3"/>
-          <ns0:cNvSpPr>
-            <ns1:spLocks noGrp="1"/>
-          </ns0:cNvSpPr>
-          <ns0:nvPr>
-            <ns0:ph type="sldNum" idx="5"/>
-          </ns0:nvPr>
-        </ns0:nvSpPr>
-        <ns0:spPr/>
-        <ns0:txBody>
-          <ns1:bodyPr/>
-          <ns1:lstStyle/>
-          <ns1:p/>
-        </ns0:txBody>
-      </ns0:sp>
-    </ns0:spTree>
-  </ns0:cSld>
-  <ns0:clrMapOvr>
-    <ns1:masterClrMapping/>
-  </ns0:clrMapOvr>
-</ns0:notes>
-</file>
-
-<file path=ppt/notesSlides/notesSlide18.xml><?xml version="1.0" encoding="utf-8"?>
-<ns0:notes xmlns:ns0="http://schemas.openxmlformats.org/presentationml/2006/main" xmlns:ns1="http://schemas.openxmlformats.org/drawingml/2006/main">
-  <ns0:cSld>
-    <ns0:spTree>
-      <ns0:nvGrpSpPr>
-        <ns0:cNvPr id="1" name=""/>
-        <ns0:cNvGrpSpPr/>
-        <ns0:nvPr/>
-      </ns0:nvGrpSpPr>
-      <ns0:grpSpPr>
-        <ns1:xfrm/>
-      </ns0:grpSpPr>
-      <ns0:sp>
-        <ns0:nvSpPr>
-          <ns0:cNvPr id="2" name="Slide Image Placeholder 1"/>
-          <ns0:cNvSpPr>
-            <ns1:spLocks noGrp="1"/>
-          </ns0:cNvSpPr>
-          <ns0:nvPr>
-            <ns0:ph type="sldImg" idx="0"/>
-          </ns0:nvPr>
-        </ns0:nvSpPr>
-        <ns0:spPr/>
-      </ns0:sp>
-      <ns0:sp>
-        <ns0:nvSpPr>
-          <ns0:cNvPr id="3" name="Notes Placeholder 2"/>
-          <ns0:cNvSpPr>
-            <ns1:spLocks noGrp="1"/>
-          </ns0:cNvSpPr>
-          <ns0:nvPr>
-            <ns0:ph type="body" idx="1"/>
-          </ns0:nvPr>
-        </ns0:nvSpPr>
-        <ns0:spPr/>
-        <ns0:txBody>
-          <ns1:bodyPr/>
-          <ns1:lstStyle/>
-          <ns1:p>
-            <ns1:r>
-              <ns1:t/>
-            </ns1:r>
-          </ns1:p>
-        </ns0:txBody>
-      </ns0:sp>
-      <ns0:sp>
-        <ns0:nvSpPr>
-          <ns0:cNvPr id="4" name="Slide Number Placeholder 3"/>
-          <ns0:cNvSpPr>
-            <ns1:spLocks noGrp="1"/>
-          </ns0:cNvSpPr>
-          <ns0:nvPr>
-            <ns0:ph type="sldNum" idx="5"/>
-          </ns0:nvPr>
-        </ns0:nvSpPr>
-        <ns0:spPr/>
-        <ns0:txBody>
-          <ns1:bodyPr/>
-          <ns1:lstStyle/>
-          <ns1:p/>
-        </ns0:txBody>
-      </ns0:sp>
-    </ns0:spTree>
-  </ns0:cSld>
-  <ns0:clrMapOvr>
-    <ns1:masterClrMapping/>
-  </ns0:clrMapOvr>
-</ns0:notes>
-</file>
-
-<file path=ppt/notesSlides/notesSlide19.xml><?xml version="1.0" encoding="utf-8"?>
-<ns0:notes xmlns:ns0="http://schemas.openxmlformats.org/presentationml/2006/main" xmlns:ns1="http://schemas.openxmlformats.org/drawingml/2006/main">
-  <ns0:cSld>
-    <ns0:spTree>
-      <ns0:nvGrpSpPr>
-        <ns0:cNvPr id="1" name=""/>
-        <ns0:cNvGrpSpPr/>
-        <ns0:nvPr/>
-      </ns0:nvGrpSpPr>
-      <ns0:grpSpPr>
-        <ns1:xfrm/>
-      </ns0:grpSpPr>
-      <ns0:sp>
-        <ns0:nvSpPr>
-          <ns0:cNvPr id="2" name="Slide Image Placeholder 1"/>
-          <ns0:cNvSpPr>
-            <ns1:spLocks noGrp="1"/>
-          </ns0:cNvSpPr>
-          <ns0:nvPr>
-            <ns0:ph type="sldImg" idx="0"/>
-          </ns0:nvPr>
-        </ns0:nvSpPr>
-        <ns0:spPr/>
-      </ns0:sp>
-      <ns0:sp>
-        <ns0:nvSpPr>
-          <ns0:cNvPr id="3" name="Notes Placeholder 2"/>
-          <ns0:cNvSpPr>
-            <ns1:spLocks noGrp="1"/>
-          </ns0:cNvSpPr>
-          <ns0:nvPr>
-            <ns0:ph type="body" idx="1"/>
-          </ns0:nvPr>
-        </ns0:nvSpPr>
-        <ns0:spPr/>
-        <ns0:txBody>
-          <ns1:bodyPr/>
-          <ns1:lstStyle/>
-          <ns1:p>
-            <ns1:r>
-              <ns1:t/>
-            </ns1:r>
-          </ns1:p>
-        </ns0:txBody>
-      </ns0:sp>
-      <ns0:sp>
-        <ns0:nvSpPr>
-          <ns0:cNvPr id="4" name="Slide Number Placeholder 3"/>
-          <ns0:cNvSpPr>
-            <ns1:spLocks noGrp="1"/>
-          </ns0:cNvSpPr>
-          <ns0:nvPr>
-            <ns0:ph type="sldNum" idx="5"/>
-          </ns0:nvPr>
-        </ns0:nvSpPr>
-        <ns0:spPr/>
-        <ns0:txBody>
-          <ns1:bodyPr/>
-          <ns1:lstStyle/>
-          <ns1:p/>
-        </ns0:txBody>
-      </ns0:sp>
-    </ns0:spTree>
-  </ns0:cSld>
-  <ns0:clrMapOvr>
-    <ns1:masterClrMapping/>
-  </ns0:clrMapOvr>
-</ns0:notes>
-</file>
-
-<file path=ppt/notesSlides/notesSlide2.xml><?xml version="1.0" encoding="utf-8"?>
-<ns0:notes xmlns:ns0="http://schemas.openxmlformats.org/presentationml/2006/main" xmlns:ns1="http://schemas.openxmlformats.org/drawingml/2006/main">
-  <ns0:cSld>
-    <ns0:spTree>
-      <ns0:nvGrpSpPr>
-        <ns0:cNvPr id="1" name=""/>
-        <ns0:cNvGrpSpPr/>
-        <ns0:nvPr/>
-      </ns0:nvGrpSpPr>
-      <ns0:grpSpPr>
-        <ns1:xfrm/>
-      </ns0:grpSpPr>
-      <ns0:sp>
-        <ns0:nvSpPr>
-          <ns0:cNvPr id="2" name="Slide Image Placeholder 1"/>
-          <ns0:cNvSpPr>
-            <ns1:spLocks noGrp="1"/>
-          </ns0:cNvSpPr>
-          <ns0:nvPr>
-            <ns0:ph type="sldImg" idx="0"/>
-          </ns0:nvPr>
-        </ns0:nvSpPr>
-        <ns0:spPr/>
-      </ns0:sp>
-      <ns0:sp>
-        <ns0:nvSpPr>
-          <ns0:cNvPr id="3" name="Notes Placeholder 2"/>
-          <ns0:cNvSpPr>
-            <ns1:spLocks noGrp="1"/>
-          </ns0:cNvSpPr>
-          <ns0:nvPr>
-            <ns0:ph type="body" idx="1"/>
-          </ns0:nvPr>
-        </ns0:nvSpPr>
-        <ns0:spPr/>
-        <ns0:txBody>
-          <ns1:bodyPr/>
-          <ns1:lstStyle/>
-          <ns1:p>
-            <ns1:r>
-              <ns1:t/>
-            </ns1:r>
-          </ns1:p>
-        </ns0:txBody>
-      </ns0:sp>
-      <ns0:sp>
-        <ns0:nvSpPr>
-          <ns0:cNvPr id="4" name="Slide Number Placeholder 3"/>
-          <ns0:cNvSpPr>
-            <ns1:spLocks noGrp="1"/>
-          </ns0:cNvSpPr>
-          <ns0:nvPr>
-            <ns0:ph type="sldNum" idx="5"/>
-          </ns0:nvPr>
-        </ns0:nvSpPr>
-        <ns0:spPr/>
-        <ns0:txBody>
-          <ns1:bodyPr/>
-          <ns1:lstStyle/>
-          <ns1:p/>
-        </ns0:txBody>
-      </ns0:sp>
-    </ns0:spTree>
-  </ns0:cSld>
-  <ns0:clrMapOvr>
-    <ns1:masterClrMapping/>
-  </ns0:clrMapOvr>
-</ns0:notes>
-</file>
-
-<file path=ppt/notesSlides/notesSlide20.xml><?xml version="1.0" encoding="utf-8"?>
-<ns0:notes xmlns:ns0="http://schemas.openxmlformats.org/presentationml/2006/main" xmlns:ns1="http://schemas.openxmlformats.org/drawingml/2006/main">
-  <ns0:cSld>
-    <ns0:spTree>
-      <ns0:nvGrpSpPr>
-        <ns0:cNvPr id="1" name=""/>
-        <ns0:cNvGrpSpPr/>
-        <ns0:nvPr/>
-      </ns0:nvGrpSpPr>
-      <ns0:grpSpPr>
-        <ns1:xfrm/>
-      </ns0:grpSpPr>
-      <ns0:sp>
-        <ns0:nvSpPr>
-          <ns0:cNvPr id="2" name="Slide Image Placeholder 1"/>
-          <ns0:cNvSpPr>
-            <ns1:spLocks noGrp="1"/>
-          </ns0:cNvSpPr>
-          <ns0:nvPr>
-            <ns0:ph type="sldImg" idx="0"/>
-          </ns0:nvPr>
-        </ns0:nvSpPr>
-        <ns0:spPr/>
-      </ns0:sp>
-      <ns0:sp>
-        <ns0:nvSpPr>
-          <ns0:cNvPr id="3" name="Notes Placeholder 2"/>
-          <ns0:cNvSpPr>
-            <ns1:spLocks noGrp="1"/>
-          </ns0:cNvSpPr>
-          <ns0:nvPr>
-            <ns0:ph type="body" idx="1"/>
-          </ns0:nvPr>
-        </ns0:nvSpPr>
-        <ns0:spPr/>
-        <ns0:txBody>
-          <ns1:bodyPr/>
-          <ns1:lstStyle/>
-          <ns1:p>
-            <ns1:r>
-              <ns1:t/>
-            </ns1:r>
-          </ns1:p>
-        </ns0:txBody>
-      </ns0:sp>
-      <ns0:sp>
-        <ns0:nvSpPr>
-          <ns0:cNvPr id="4" name="Slide Number Placeholder 3"/>
-          <ns0:cNvSpPr>
-            <ns1:spLocks noGrp="1"/>
-          </ns0:cNvSpPr>
-          <ns0:nvPr>
-            <ns0:ph type="sldNum" idx="5"/>
-          </ns0:nvPr>
-        </ns0:nvSpPr>
-        <ns0:spPr/>
-        <ns0:txBody>
-          <ns1:bodyPr/>
-          <ns1:lstStyle/>
-          <ns1:p/>
-        </ns0:txBody>
-      </ns0:sp>
-    </ns0:spTree>
-  </ns0:cSld>
-  <ns0:clrMapOvr>
-    <ns1:masterClrMapping/>
-  </ns0:clrMapOvr>
-</ns0:notes>
-</file>
-
-<file path=ppt/notesSlides/notesSlide21.xml><?xml version="1.0" encoding="utf-8"?>
-<ns0:notes xmlns:ns0="http://schemas.openxmlformats.org/presentationml/2006/main" xmlns:ns1="http://schemas.openxmlformats.org/drawingml/2006/main">
-  <ns0:cSld>
-    <ns0:spTree>
-      <ns0:nvGrpSpPr>
-        <ns0:cNvPr id="1" name=""/>
-        <ns0:cNvGrpSpPr/>
-        <ns0:nvPr/>
-      </ns0:nvGrpSpPr>
-      <ns0:grpSpPr>
-        <ns1:xfrm/>
-      </ns0:grpSpPr>
-      <ns0:sp>
-        <ns0:nvSpPr>
-          <ns0:cNvPr id="2" name="Slide Image Placeholder 1"/>
-          <ns0:cNvSpPr>
-            <ns1:spLocks noGrp="1"/>
-          </ns0:cNvSpPr>
-          <ns0:nvPr>
-            <ns0:ph type="sldImg" idx="0"/>
-          </ns0:nvPr>
-        </ns0:nvSpPr>
-        <ns0:spPr/>
-      </ns0:sp>
-      <ns0:sp>
-        <ns0:nvSpPr>
-          <ns0:cNvPr id="3" name="Notes Placeholder 2"/>
-          <ns0:cNvSpPr>
-            <ns1:spLocks noGrp="1"/>
-          </ns0:cNvSpPr>
-          <ns0:nvPr>
-            <ns0:ph type="body" idx="1"/>
-          </ns0:nvPr>
-        </ns0:nvSpPr>
-        <ns0:spPr/>
-        <ns0:txBody>
-          <ns1:bodyPr/>
-          <ns1:lstStyle/>
-          <ns1:p>
-            <ns1:r>
-              <ns1:t/>
-            </ns1:r>
-          </ns1:p>
-        </ns0:txBody>
-      </ns0:sp>
-      <ns0:sp>
-        <ns0:nvSpPr>
-          <ns0:cNvPr id="4" name="Slide Number Placeholder 3"/>
-          <ns0:cNvSpPr>
-            <ns1:spLocks noGrp="1"/>
-          </ns0:cNvSpPr>
-          <ns0:nvPr>
-            <ns0:ph type="sldNum" idx="5"/>
-          </ns0:nvPr>
-        </ns0:nvSpPr>
-        <ns0:spPr/>
-        <ns0:txBody>
-          <ns1:bodyPr/>
-          <ns1:lstStyle/>
-          <ns1:p/>
-        </ns0:txBody>
-      </ns0:sp>
-    </ns0:spTree>
-  </ns0:cSld>
-  <ns0:clrMapOvr>
-    <ns1:masterClrMapping/>
-  </ns0:clrMapOvr>
-</ns0:notes>
-</file>
-
-<file path=ppt/notesSlides/notesSlide22.xml><?xml version="1.0" encoding="utf-8"?>
-<ns0:notes xmlns:ns0="http://schemas.openxmlformats.org/presentationml/2006/main" xmlns:ns1="http://schemas.openxmlformats.org/drawingml/2006/main">
-  <ns0:cSld>
-    <ns0:spTree>
-      <ns0:nvGrpSpPr>
-        <ns0:cNvPr id="1" name=""/>
-        <ns0:cNvGrpSpPr/>
-        <ns0:nvPr/>
-      </ns0:nvGrpSpPr>
-      <ns0:grpSpPr>
-        <ns1:xfrm/>
-      </ns0:grpSpPr>
-      <ns0:sp>
-        <ns0:nvSpPr>
-          <ns0:cNvPr id="2" name="Slide Image Placeholder 1"/>
-          <ns0:cNvSpPr>
-            <ns1:spLocks noGrp="1"/>
-          </ns0:cNvSpPr>
-          <ns0:nvPr>
-            <ns0:ph type="sldImg" idx="0"/>
-          </ns0:nvPr>
-        </ns0:nvSpPr>
-        <ns0:spPr/>
-      </ns0:sp>
-      <ns0:sp>
-        <ns0:nvSpPr>
-          <ns0:cNvPr id="3" name="Notes Placeholder 2"/>
-          <ns0:cNvSpPr>
-            <ns1:spLocks noGrp="1"/>
-          </ns0:cNvSpPr>
-          <ns0:nvPr>
-            <ns0:ph type="body" idx="1"/>
-          </ns0:nvPr>
-        </ns0:nvSpPr>
-        <ns0:spPr/>
-        <ns0:txBody>
-          <ns1:bodyPr/>
-          <ns1:lstStyle/>
-          <ns1:p>
-            <ns1:r>
-              <ns1:t/>
-            </ns1:r>
-          </ns1:p>
-        </ns0:txBody>
-      </ns0:sp>
-      <ns0:sp>
-        <ns0:nvSpPr>
-          <ns0:cNvPr id="4" name="Slide Number Placeholder 3"/>
-          <ns0:cNvSpPr>
-            <ns1:spLocks noGrp="1"/>
-          </ns0:cNvSpPr>
-          <ns0:nvPr>
-            <ns0:ph type="sldNum" idx="5"/>
-          </ns0:nvPr>
-        </ns0:nvSpPr>
-        <ns0:spPr/>
-        <ns0:txBody>
-          <ns1:bodyPr/>
-          <ns1:lstStyle/>
-          <ns1:p/>
-        </ns0:txBody>
-      </ns0:sp>
-    </ns0:spTree>
-  </ns0:cSld>
-  <ns0:clrMapOvr>
-    <ns1:masterClrMapping/>
-  </ns0:clrMapOvr>
-</ns0:notes>
-</file>
-
-<file path=ppt/notesSlides/notesSlide23.xml><?xml version="1.0" encoding="utf-8"?>
-<ns0:notes xmlns:ns0="http://schemas.openxmlformats.org/presentationml/2006/main" xmlns:ns1="http://schemas.openxmlformats.org/drawingml/2006/main">
-  <ns0:cSld>
-    <ns0:spTree>
-      <ns0:nvGrpSpPr>
-        <ns0:cNvPr id="1" name=""/>
-        <ns0:cNvGrpSpPr/>
-        <ns0:nvPr/>
-      </ns0:nvGrpSpPr>
-      <ns0:grpSpPr>
-        <ns1:xfrm/>
-      </ns0:grpSpPr>
-      <ns0:sp>
-        <ns0:nvSpPr>
-          <ns0:cNvPr id="2" name="Slide Image Placeholder 1"/>
-          <ns0:cNvSpPr>
-            <ns1:spLocks noGrp="1"/>
-          </ns0:cNvSpPr>
-          <ns0:nvPr>
-            <ns0:ph type="sldImg" idx="0"/>
-          </ns0:nvPr>
-        </ns0:nvSpPr>
-        <ns0:spPr/>
-      </ns0:sp>
-      <ns0:sp>
-        <ns0:nvSpPr>
-          <ns0:cNvPr id="3" name="Notes Placeholder 2"/>
-          <ns0:cNvSpPr>
-            <ns1:spLocks noGrp="1"/>
-          </ns0:cNvSpPr>
-          <ns0:nvPr>
-            <ns0:ph type="body" idx="1"/>
-          </ns0:nvPr>
-        </ns0:nvSpPr>
-        <ns0:spPr/>
-        <ns0:txBody>
-          <ns1:bodyPr/>
-          <ns1:lstStyle/>
-          <ns1:p>
-            <ns1:r>
-              <ns1:t/>
-            </ns1:r>
-          </ns1:p>
-        </ns0:txBody>
-      </ns0:sp>
-      <ns0:sp>
-        <ns0:nvSpPr>
-          <ns0:cNvPr id="4" name="Slide Number Placeholder 3"/>
-          <ns0:cNvSpPr>
-            <ns1:spLocks noGrp="1"/>
-          </ns0:cNvSpPr>
-          <ns0:nvPr>
-            <ns0:ph type="sldNum" idx="5"/>
-          </ns0:nvPr>
-        </ns0:nvSpPr>
-        <ns0:spPr/>
-        <ns0:txBody>
-          <ns1:bodyPr/>
-          <ns1:lstStyle/>
-          <ns1:p/>
-        </ns0:txBody>
-      </ns0:sp>
-    </ns0:spTree>
-  </ns0:cSld>
-  <ns0:clrMapOvr>
-    <ns1:masterClrMapping/>
-  </ns0:clrMapOvr>
-</ns0:notes>
-</file>
-
-<file path=ppt/notesSlides/notesSlide24.xml><?xml version="1.0" encoding="utf-8"?>
-<ns0:notes xmlns:ns0="http://schemas.openxmlformats.org/presentationml/2006/main" xmlns:ns1="http://schemas.openxmlformats.org/drawingml/2006/main">
-  <ns0:cSld>
-    <ns0:spTree>
-      <ns0:nvGrpSpPr>
-        <ns0:cNvPr id="1" name=""/>
-        <ns0:cNvGrpSpPr/>
-        <ns0:nvPr/>
-      </ns0:nvGrpSpPr>
-      <ns0:grpSpPr>
-        <ns1:xfrm/>
-      </ns0:grpSpPr>
-      <ns0:sp>
-        <ns0:nvSpPr>
-          <ns0:cNvPr id="2" name="Slide Image Placeholder 1"/>
-          <ns0:cNvSpPr>
-            <ns1:spLocks noGrp="1"/>
-          </ns0:cNvSpPr>
-          <ns0:nvPr>
-            <ns0:ph type="sldImg" idx="0"/>
-          </ns0:nvPr>
-        </ns0:nvSpPr>
-        <ns0:spPr/>
-      </ns0:sp>
-      <ns0:sp>
-        <ns0:nvSpPr>
-          <ns0:cNvPr id="3" name="Notes Placeholder 2"/>
-          <ns0:cNvSpPr>
-            <ns1:spLocks noGrp="1"/>
-          </ns0:cNvSpPr>
-          <ns0:nvPr>
-            <ns0:ph type="body" idx="1"/>
-          </ns0:nvPr>
-        </ns0:nvSpPr>
-        <ns0:spPr/>
-        <ns0:txBody>
-          <ns1:bodyPr/>
-          <ns1:lstStyle/>
-          <ns1:p>
-            <ns1:r>
-              <ns1:t/>
-            </ns1:r>
-          </ns1:p>
-        </ns0:txBody>
-      </ns0:sp>
-      <ns0:sp>
-        <ns0:nvSpPr>
-          <ns0:cNvPr id="4" name="Slide Number Placeholder 3"/>
-          <ns0:cNvSpPr>
-            <ns1:spLocks noGrp="1"/>
-          </ns0:cNvSpPr>
-          <ns0:nvPr>
-            <ns0:ph type="sldNum" idx="5"/>
-          </ns0:nvPr>
-        </ns0:nvSpPr>
-        <ns0:spPr/>
-        <ns0:txBody>
-          <ns1:bodyPr/>
-          <ns1:lstStyle/>
-          <ns1:p/>
-        </ns0:txBody>
-      </ns0:sp>
-    </ns0:spTree>
-  </ns0:cSld>
-  <ns0:clrMapOvr>
-    <ns1:masterClrMapping/>
-  </ns0:clrMapOvr>
-</ns0:notes>
-</file>
-
-<file path=ppt/notesSlides/notesSlide25.xml><?xml version="1.0" encoding="utf-8"?>
-<ns0:notes xmlns:ns0="http://schemas.openxmlformats.org/presentationml/2006/main" xmlns:ns1="http://schemas.openxmlformats.org/drawingml/2006/main">
-  <ns0:cSld>
-    <ns0:spTree>
-      <ns0:nvGrpSpPr>
-        <ns0:cNvPr id="1" name=""/>
-        <ns0:cNvGrpSpPr/>
-        <ns0:nvPr/>
-      </ns0:nvGrpSpPr>
-      <ns0:grpSpPr>
-        <ns1:xfrm/>
-      </ns0:grpSpPr>
-      <ns0:sp>
-        <ns0:nvSpPr>
-          <ns0:cNvPr id="2" name="Slide Image Placeholder 1"/>
-          <ns0:cNvSpPr>
-            <ns1:spLocks noGrp="1"/>
-          </ns0:cNvSpPr>
-          <ns0:nvPr>
-            <ns0:ph type="sldImg" idx="0"/>
-          </ns0:nvPr>
-        </ns0:nvSpPr>
-        <ns0:spPr/>
-      </ns0:sp>
-      <ns0:sp>
-        <ns0:nvSpPr>
-          <ns0:cNvPr id="3" name="Notes Placeholder 2"/>
-          <ns0:cNvSpPr>
-            <ns1:spLocks noGrp="1"/>
-          </ns0:cNvSpPr>
-          <ns0:nvPr>
-            <ns0:ph type="body" idx="1"/>
-          </ns0:nvPr>
-        </ns0:nvSpPr>
-        <ns0:spPr/>
-        <ns0:txBody>
-          <ns1:bodyPr/>
-          <ns1:lstStyle/>
-          <ns1:p>
-            <ns1:r>
-              <ns1:t/>
-            </ns1:r>
-          </ns1:p>
-        </ns0:txBody>
-      </ns0:sp>
-      <ns0:sp>
-        <ns0:nvSpPr>
-          <ns0:cNvPr id="4" name="Slide Number Placeholder 3"/>
-          <ns0:cNvSpPr>
-            <ns1:spLocks noGrp="1"/>
-          </ns0:cNvSpPr>
-          <ns0:nvPr>
-            <ns0:ph type="sldNum" idx="5"/>
-          </ns0:nvPr>
-        </ns0:nvSpPr>
-        <ns0:spPr/>
-        <ns0:txBody>
-          <ns1:bodyPr/>
-          <ns1:lstStyle/>
-          <ns1:p/>
-        </ns0:txBody>
-      </ns0:sp>
-    </ns0:spTree>
-  </ns0:cSld>
-  <ns0:clrMapOvr>
-    <ns1:masterClrMapping/>
-  </ns0:clrMapOvr>
-</ns0:notes>
-</file>
-
-<file path=ppt/notesSlides/notesSlide26.xml><?xml version="1.0" encoding="utf-8"?>
-<ns0:notes xmlns:ns0="http://schemas.openxmlformats.org/presentationml/2006/main" xmlns:ns1="http://schemas.openxmlformats.org/drawingml/2006/main">
-  <ns0:cSld>
-    <ns0:spTree>
-      <ns0:nvGrpSpPr>
-        <ns0:cNvPr id="1" name=""/>
-        <ns0:cNvGrpSpPr/>
-        <ns0:nvPr/>
-      </ns0:nvGrpSpPr>
-      <ns0:grpSpPr>
-        <ns1:xfrm/>
-      </ns0:grpSpPr>
-      <ns0:sp>
-        <ns0:nvSpPr>
-          <ns0:cNvPr id="2" name="Slide Image Placeholder 1"/>
-          <ns0:cNvSpPr>
-            <ns1:spLocks noGrp="1"/>
-          </ns0:cNvSpPr>
-          <ns0:nvPr>
-            <ns0:ph type="sldImg" idx="0"/>
-          </ns0:nvPr>
-        </ns0:nvSpPr>
-        <ns0:spPr/>
-      </ns0:sp>
-      <ns0:sp>
-        <ns0:nvSpPr>
-          <ns0:cNvPr id="3" name="Notes Placeholder 2"/>
-          <ns0:cNvSpPr>
-            <ns1:spLocks noGrp="1"/>
-          </ns0:cNvSpPr>
-          <ns0:nvPr>
-            <ns0:ph type="body" idx="1"/>
-          </ns0:nvPr>
-        </ns0:nvSpPr>
-        <ns0:spPr/>
-        <ns0:txBody>
-          <ns1:bodyPr/>
-          <ns1:lstStyle/>
-          <ns1:p>
-            <ns1:r>
-              <ns1:t/>
-            </ns1:r>
-          </ns1:p>
-        </ns0:txBody>
-      </ns0:sp>
-      <ns0:sp>
-        <ns0:nvSpPr>
-          <ns0:cNvPr id="4" name="Slide Number Placeholder 3"/>
-          <ns0:cNvSpPr>
-            <ns1:spLocks noGrp="1"/>
-          </ns0:cNvSpPr>
-          <ns0:nvPr>
-            <ns0:ph type="sldNum" idx="5"/>
-          </ns0:nvPr>
-        </ns0:nvSpPr>
-        <ns0:spPr/>
-        <ns0:txBody>
-          <ns1:bodyPr/>
-          <ns1:lstStyle/>
-          <ns1:p/>
-        </ns0:txBody>
-      </ns0:sp>
-    </ns0:spTree>
-  </ns0:cSld>
-  <ns0:clrMapOvr>
-    <ns1:masterClrMapping/>
-  </ns0:clrMapOvr>
-</ns0:notes>
-</file>
-
-<file path=ppt/notesSlides/notesSlide27.xml><?xml version="1.0" encoding="utf-8"?>
-<ns0:notes xmlns:ns0="http://schemas.openxmlformats.org/presentationml/2006/main" xmlns:ns1="http://schemas.openxmlformats.org/drawingml/2006/main">
-  <ns0:cSld>
-    <ns0:spTree>
-      <ns0:nvGrpSpPr>
-        <ns0:cNvPr id="1" name=""/>
-        <ns0:cNvGrpSpPr/>
-        <ns0:nvPr/>
-      </ns0:nvGrpSpPr>
-      <ns0:grpSpPr>
-        <ns1:xfrm/>
-      </ns0:grpSpPr>
-      <ns0:sp>
-        <ns0:nvSpPr>
-          <ns0:cNvPr id="2" name="Slide Image Placeholder 1"/>
-          <ns0:cNvSpPr>
-            <ns1:spLocks noGrp="1"/>
-          </ns0:cNvSpPr>
-          <ns0:nvPr>
-            <ns0:ph type="sldImg" idx="0"/>
-          </ns0:nvPr>
-        </ns0:nvSpPr>
-        <ns0:spPr/>
-      </ns0:sp>
-      <ns0:sp>
-        <ns0:nvSpPr>
-          <ns0:cNvPr id="3" name="Notes Placeholder 2"/>
-          <ns0:cNvSpPr>
-            <ns1:spLocks noGrp="1"/>
-          </ns0:cNvSpPr>
-          <ns0:nvPr>
-            <ns0:ph type="body" idx="1"/>
-          </ns0:nvPr>
-        </ns0:nvSpPr>
-        <ns0:spPr/>
-        <ns0:txBody>
-          <ns1:bodyPr/>
-          <ns1:lstStyle/>
-          <ns1:p>
-            <ns1:r>
-              <ns1:t/>
-            </ns1:r>
-          </ns1:p>
-        </ns0:txBody>
-      </ns0:sp>
-      <ns0:sp>
-        <ns0:nvSpPr>
-          <ns0:cNvPr id="4" name="Slide Number Placeholder 3"/>
-          <ns0:cNvSpPr>
-            <ns1:spLocks noGrp="1"/>
-          </ns0:cNvSpPr>
-          <ns0:nvPr>
-            <ns0:ph type="sldNum" idx="5"/>
-          </ns0:nvPr>
-        </ns0:nvSpPr>
-        <ns0:spPr/>
-        <ns0:txBody>
-          <ns1:bodyPr/>
-          <ns1:lstStyle/>
-          <ns1:p/>
-        </ns0:txBody>
-      </ns0:sp>
-    </ns0:spTree>
-  </ns0:cSld>
-  <ns0:clrMapOvr>
-    <ns1:masterClrMapping/>
-  </ns0:clrMapOvr>
-</ns0:notes>
-</file>
-
-<file path=ppt/notesSlides/notesSlide28.xml><?xml version="1.0" encoding="utf-8"?>
-<ns0:notes xmlns:ns0="http://schemas.openxmlformats.org/presentationml/2006/main" xmlns:ns1="http://schemas.openxmlformats.org/drawingml/2006/main">
-  <ns0:cSld>
-    <ns0:spTree>
-      <ns0:nvGrpSpPr>
-        <ns0:cNvPr id="1" name=""/>
-        <ns0:cNvGrpSpPr/>
-        <ns0:nvPr/>
-      </ns0:nvGrpSpPr>
-      <ns0:grpSpPr>
-        <ns1:xfrm/>
-      </ns0:grpSpPr>
-      <ns0:sp>
-        <ns0:nvSpPr>
-          <ns0:cNvPr id="2" name="Slide Image Placeholder 1"/>
-          <ns0:cNvSpPr>
-            <ns1:spLocks noGrp="1"/>
-          </ns0:cNvSpPr>
-          <ns0:nvPr>
-            <ns0:ph type="sldImg" idx="0"/>
-          </ns0:nvPr>
-        </ns0:nvSpPr>
-        <ns0:spPr/>
-      </ns0:sp>
-      <ns0:sp>
-        <ns0:nvSpPr>
-          <ns0:cNvPr id="3" name="Notes Placeholder 2"/>
-          <ns0:cNvSpPr>
-            <ns1:spLocks noGrp="1"/>
-          </ns0:cNvSpPr>
-          <ns0:nvPr>
-            <ns0:ph type="body" idx="1"/>
-          </ns0:nvPr>
-        </ns0:nvSpPr>
-        <ns0:spPr/>
-        <ns0:txBody>
-          <ns1:bodyPr/>
-          <ns1:lstStyle/>
-          <ns1:p>
-            <ns1:r>
-              <ns1:t/>
-            </ns1:r>
-          </ns1:p>
-        </ns0:txBody>
-      </ns0:sp>
-      <ns0:sp>
-        <ns0:nvSpPr>
-          <ns0:cNvPr id="4" name="Slide Number Placeholder 3"/>
-          <ns0:cNvSpPr>
-            <ns1:spLocks noGrp="1"/>
-          </ns0:cNvSpPr>
-          <ns0:nvPr>
-            <ns0:ph type="sldNum" idx="5"/>
-          </ns0:nvPr>
-        </ns0:nvSpPr>
-        <ns0:spPr/>
-        <ns0:txBody>
-          <ns1:bodyPr/>
-          <ns1:lstStyle/>
-          <ns1:p/>
-        </ns0:txBody>
-      </ns0:sp>
-    </ns0:spTree>
-  </ns0:cSld>
-  <ns0:clrMapOvr>
-    <ns1:masterClrMapping/>
-  </ns0:clrMapOvr>
-</ns0:notes>
-</file>
-
-<file path=ppt/notesSlides/notesSlide29.xml><?xml version="1.0" encoding="utf-8"?>
-<ns0:notes xmlns:ns0="http://schemas.openxmlformats.org/presentationml/2006/main" xmlns:ns1="http://schemas.openxmlformats.org/drawingml/2006/main">
-  <ns0:cSld>
-    <ns0:spTree>
-      <ns0:nvGrpSpPr>
-        <ns0:cNvPr id="1" name=""/>
-        <ns0:cNvGrpSpPr/>
-        <ns0:nvPr/>
-      </ns0:nvGrpSpPr>
-      <ns0:grpSpPr>
-        <ns1:xfrm/>
-      </ns0:grpSpPr>
-      <ns0:sp>
-        <ns0:nvSpPr>
-          <ns0:cNvPr id="2" name="Slide Image Placeholder 1"/>
-          <ns0:cNvSpPr>
-            <ns1:spLocks noGrp="1"/>
-          </ns0:cNvSpPr>
-          <ns0:nvPr>
-            <ns0:ph type="sldImg" idx="0"/>
-          </ns0:nvPr>
-        </ns0:nvSpPr>
-        <ns0:spPr/>
-      </ns0:sp>
-      <ns0:sp>
-        <ns0:nvSpPr>
-          <ns0:cNvPr id="3" name="Notes Placeholder 2"/>
-          <ns0:cNvSpPr>
-            <ns1:spLocks noGrp="1"/>
-          </ns0:cNvSpPr>
-          <ns0:nvPr>
-            <ns0:ph type="body" idx="1"/>
-          </ns0:nvPr>
-        </ns0:nvSpPr>
-        <ns0:spPr/>
-        <ns0:txBody>
-          <ns1:bodyPr/>
-          <ns1:lstStyle/>
-          <ns1:p>
-            <ns1:r>
-              <ns1:t/>
-            </ns1:r>
-          </ns1:p>
-        </ns0:txBody>
-      </ns0:sp>
-      <ns0:sp>
-        <ns0:nvSpPr>
-          <ns0:cNvPr id="4" name="Slide Number Placeholder 3"/>
-          <ns0:cNvSpPr>
-            <ns1:spLocks noGrp="1"/>
-          </ns0:cNvSpPr>
-          <ns0:nvPr>
-            <ns0:ph type="sldNum" idx="5"/>
-          </ns0:nvPr>
-        </ns0:nvSpPr>
-        <ns0:spPr/>
-        <ns0:txBody>
-          <ns1:bodyPr/>
-          <ns1:lstStyle/>
-          <ns1:p/>
-        </ns0:txBody>
-      </ns0:sp>
-    </ns0:spTree>
-  </ns0:cSld>
-  <ns0:clrMapOvr>
-    <ns1:masterClrMapping/>
-  </ns0:clrMapOvr>
-</ns0:notes>
-</file>
-
-<file path=ppt/notesSlides/notesSlide3.xml><?xml version="1.0" encoding="utf-8"?>
-<ns0:notes xmlns:ns0="http://schemas.openxmlformats.org/presentationml/2006/main" xmlns:ns1="http://schemas.openxmlformats.org/drawingml/2006/main">
-  <ns0:cSld>
-    <ns0:spTree>
-      <ns0:nvGrpSpPr>
-        <ns0:cNvPr id="1" name=""/>
-        <ns0:cNvGrpSpPr/>
-        <ns0:nvPr/>
-      </ns0:nvGrpSpPr>
-      <ns0:grpSpPr>
-        <ns1:xfrm/>
-      </ns0:grpSpPr>
-      <ns0:sp>
-        <ns0:nvSpPr>
-          <ns0:cNvPr id="2" name="Slide Image Placeholder 1"/>
-          <ns0:cNvSpPr>
-            <ns1:spLocks noGrp="1"/>
-          </ns0:cNvSpPr>
-          <ns0:nvPr>
-            <ns0:ph type="sldImg" idx="0"/>
-          </ns0:nvPr>
-        </ns0:nvSpPr>
-        <ns0:spPr/>
-      </ns0:sp>
-      <ns0:sp>
-        <ns0:nvSpPr>
-          <ns0:cNvPr id="3" name="Notes Placeholder 2"/>
-          <ns0:cNvSpPr>
-            <ns1:spLocks noGrp="1"/>
-          </ns0:cNvSpPr>
-          <ns0:nvPr>
-            <ns0:ph type="body" idx="1"/>
-          </ns0:nvPr>
-        </ns0:nvSpPr>
-        <ns0:spPr/>
-        <ns0:txBody>
-          <ns1:bodyPr/>
-          <ns1:lstStyle/>
-          <ns1:p>
-            <ns1:r>
-              <ns1:t/>
-            </ns1:r>
-          </ns1:p>
-        </ns0:txBody>
-      </ns0:sp>
-      <ns0:sp>
-        <ns0:nvSpPr>
-          <ns0:cNvPr id="4" name="Slide Number Placeholder 3"/>
-          <ns0:cNvSpPr>
-            <ns1:spLocks noGrp="1"/>
-          </ns0:cNvSpPr>
-          <ns0:nvPr>
-            <ns0:ph type="sldNum" idx="5"/>
-          </ns0:nvPr>
-        </ns0:nvSpPr>
-        <ns0:spPr/>
-        <ns0:txBody>
-          <ns1:bodyPr/>
-          <ns1:lstStyle/>
-          <ns1:p/>
-        </ns0:txBody>
-      </ns0:sp>
-    </ns0:spTree>
-  </ns0:cSld>
-  <ns0:clrMapOvr>
-    <ns1:masterClrMapping/>
-  </ns0:clrMapOvr>
-</ns0:notes>
-</file>
-
-<file path=ppt/notesSlides/notesSlide30.xml><?xml version="1.0" encoding="utf-8"?>
-<ns0:notes xmlns:ns0="http://schemas.openxmlformats.org/presentationml/2006/main" xmlns:ns1="http://schemas.openxmlformats.org/drawingml/2006/main">
-  <ns0:cSld>
-    <ns0:spTree>
-      <ns0:nvGrpSpPr>
-        <ns0:cNvPr id="1" name=""/>
-        <ns0:cNvGrpSpPr/>
-        <ns0:nvPr/>
-      </ns0:nvGrpSpPr>
-      <ns0:grpSpPr>
-        <ns1:xfrm/>
-      </ns0:grpSpPr>
-      <ns0:sp>
-        <ns0:nvSpPr>
-          <ns0:cNvPr id="2" name="Slide Image Placeholder 1"/>
-          <ns0:cNvSpPr>
-            <ns1:spLocks noGrp="1"/>
-          </ns0:cNvSpPr>
-          <ns0:nvPr>
-            <ns0:ph type="sldImg" idx="0"/>
-          </ns0:nvPr>
-        </ns0:nvSpPr>
-        <ns0:spPr/>
-      </ns0:sp>
-      <ns0:sp>
-        <ns0:nvSpPr>
-          <ns0:cNvPr id="3" name="Notes Placeholder 2"/>
-          <ns0:cNvSpPr>
-            <ns1:spLocks noGrp="1"/>
-          </ns0:cNvSpPr>
-          <ns0:nvPr>
-            <ns0:ph type="body" idx="1"/>
-          </ns0:nvPr>
-        </ns0:nvSpPr>
-        <ns0:spPr/>
-        <ns0:txBody>
-          <ns1:bodyPr/>
-          <ns1:lstStyle/>
-          <ns1:p>
-            <ns1:r>
-              <ns1:t/>
-            </ns1:r>
-          </ns1:p>
-        </ns0:txBody>
-      </ns0:sp>
-      <ns0:sp>
-        <ns0:nvSpPr>
-          <ns0:cNvPr id="4" name="Slide Number Placeholder 3"/>
-          <ns0:cNvSpPr>
-            <ns1:spLocks noGrp="1"/>
-          </ns0:cNvSpPr>
-          <ns0:nvPr>
-            <ns0:ph type="sldNum" idx="5"/>
-          </ns0:nvPr>
-        </ns0:nvSpPr>
-        <ns0:spPr/>
-        <ns0:txBody>
-          <ns1:bodyPr/>
-          <ns1:lstStyle/>
-          <ns1:p/>
-        </ns0:txBody>
-      </ns0:sp>
-    </ns0:spTree>
-  </ns0:cSld>
-  <ns0:clrMapOvr>
-    <ns1:masterClrMapping/>
-  </ns0:clrMapOvr>
-</ns0:notes>
-</file>
-
-<file path=ppt/notesSlides/notesSlide31.xml><?xml version="1.0" encoding="utf-8"?>
-<ns0:notes xmlns:ns0="http://schemas.openxmlformats.org/presentationml/2006/main" xmlns:ns1="http://schemas.openxmlformats.org/drawingml/2006/main">
-  <ns0:cSld>
-    <ns0:spTree>
-      <ns0:nvGrpSpPr>
-        <ns0:cNvPr id="1" name=""/>
-        <ns0:cNvGrpSpPr/>
-        <ns0:nvPr/>
-      </ns0:nvGrpSpPr>
-      <ns0:grpSpPr>
-        <ns1:xfrm/>
-      </ns0:grpSpPr>
-      <ns0:sp>
-        <ns0:nvSpPr>
-          <ns0:cNvPr id="2" name="Slide Image Placeholder 1"/>
-          <ns0:cNvSpPr>
-            <ns1:spLocks noGrp="1"/>
-          </ns0:cNvSpPr>
-          <ns0:nvPr>
-            <ns0:ph type="sldImg" idx="0"/>
-          </ns0:nvPr>
-        </ns0:nvSpPr>
-        <ns0:spPr/>
-      </ns0:sp>
-      <ns0:sp>
-        <ns0:nvSpPr>
-          <ns0:cNvPr id="3" name="Notes Placeholder 2"/>
-          <ns0:cNvSpPr>
-            <ns1:spLocks noGrp="1"/>
-          </ns0:cNvSpPr>
-          <ns0:nvPr>
-            <ns0:ph type="body" idx="1"/>
-          </ns0:nvPr>
-        </ns0:nvSpPr>
-        <ns0:spPr/>
-        <ns0:txBody>
-          <ns1:bodyPr/>
-          <ns1:lstStyle/>
-          <ns1:p>
-            <ns1:r>
-              <ns1:t/>
-            </ns1:r>
-          </ns1:p>
-        </ns0:txBody>
-      </ns0:sp>
-      <ns0:sp>
-        <ns0:nvSpPr>
-          <ns0:cNvPr id="4" name="Slide Number Placeholder 3"/>
-          <ns0:cNvSpPr>
-            <ns1:spLocks noGrp="1"/>
-          </ns0:cNvSpPr>
-          <ns0:nvPr>
-            <ns0:ph type="sldNum" idx="5"/>
-          </ns0:nvPr>
-        </ns0:nvSpPr>
-        <ns0:spPr/>
-        <ns0:txBody>
-          <ns1:bodyPr/>
-          <ns1:lstStyle/>
-          <ns1:p/>
-        </ns0:txBody>
-      </ns0:sp>
-    </ns0:spTree>
-  </ns0:cSld>
-  <ns0:clrMapOvr>
-    <ns1:masterClrMapping/>
-  </ns0:clrMapOvr>
-</ns0:notes>
-</file>
-
-<file path=ppt/notesSlides/notesSlide32.xml><?xml version="1.0" encoding="utf-8"?>
-<ns0:notes xmlns:ns0="http://schemas.openxmlformats.org/presentationml/2006/main" xmlns:ns1="http://schemas.openxmlformats.org/drawingml/2006/main">
-  <ns0:cSld>
-    <ns0:spTree>
-      <ns0:nvGrpSpPr>
-        <ns0:cNvPr id="1" name=""/>
-        <ns0:cNvGrpSpPr/>
-        <ns0:nvPr/>
-      </ns0:nvGrpSpPr>
-      <ns0:grpSpPr>
-        <ns1:xfrm/>
-      </ns0:grpSpPr>
-      <ns0:sp>
-        <ns0:nvSpPr>
-          <ns0:cNvPr id="2" name="Slide Image Placeholder 1"/>
-          <ns0:cNvSpPr>
-            <ns1:spLocks noGrp="1"/>
-          </ns0:cNvSpPr>
-          <ns0:nvPr>
-            <ns0:ph type="sldImg" idx="0"/>
-          </ns0:nvPr>
-        </ns0:nvSpPr>
-        <ns0:spPr/>
-      </ns0:sp>
-      <ns0:sp>
-        <ns0:nvSpPr>
-          <ns0:cNvPr id="3" name="Notes Placeholder 2"/>
-          <ns0:cNvSpPr>
-            <ns1:spLocks noGrp="1"/>
-          </ns0:cNvSpPr>
-          <ns0:nvPr>
-            <ns0:ph type="body" idx="1"/>
-          </ns0:nvPr>
-        </ns0:nvSpPr>
-        <ns0:spPr/>
-        <ns0:txBody>
-          <ns1:bodyPr/>
-          <ns1:lstStyle/>
-          <ns1:p>
-            <ns1:r>
-              <ns1:t/>
-            </ns1:r>
-          </ns1:p>
-        </ns0:txBody>
-      </ns0:sp>
-      <ns0:sp>
-        <ns0:nvSpPr>
-          <ns0:cNvPr id="4" name="Slide Number Placeholder 3"/>
-          <ns0:cNvSpPr>
-            <ns1:spLocks noGrp="1"/>
-          </ns0:cNvSpPr>
-          <ns0:nvPr>
-            <ns0:ph type="sldNum" idx="5"/>
-          </ns0:nvPr>
-        </ns0:nvSpPr>
-        <ns0:spPr/>
-        <ns0:txBody>
-          <ns1:bodyPr/>
-          <ns1:lstStyle/>
-          <ns1:p/>
-        </ns0:txBody>
-      </ns0:sp>
-    </ns0:spTree>
-  </ns0:cSld>
-  <ns0:clrMapOvr>
-    <ns1:masterClrMapping/>
-  </ns0:clrMapOvr>
-</ns0:notes>
-</file>
-
-<file path=ppt/notesSlides/notesSlide33.xml><?xml version="1.0" encoding="utf-8"?>
-<ns0:notes xmlns:ns0="http://schemas.openxmlformats.org/presentationml/2006/main" xmlns:ns1="http://schemas.openxmlformats.org/drawingml/2006/main">
-  <ns0:cSld>
-    <ns0:spTree>
-      <ns0:nvGrpSpPr>
-        <ns0:cNvPr id="1" name=""/>
-        <ns0:cNvGrpSpPr/>
-        <ns0:nvPr/>
-      </ns0:nvGrpSpPr>
-      <ns0:grpSpPr>
-        <ns1:xfrm/>
-      </ns0:grpSpPr>
-      <ns0:sp>
-        <ns0:nvSpPr>
-          <ns0:cNvPr id="2" name="Slide Image Placeholder 1"/>
-          <ns0:cNvSpPr>
-            <ns1:spLocks noGrp="1"/>
-          </ns0:cNvSpPr>
-          <ns0:nvPr>
-            <ns0:ph type="sldImg" idx="0"/>
-          </ns0:nvPr>
-        </ns0:nvSpPr>
-        <ns0:spPr/>
-      </ns0:sp>
-      <ns0:sp>
-        <ns0:nvSpPr>
-          <ns0:cNvPr id="3" name="Notes Placeholder 2"/>
-          <ns0:cNvSpPr>
-            <ns1:spLocks noGrp="1"/>
-          </ns0:cNvSpPr>
-          <ns0:nvPr>
-            <ns0:ph type="body" idx="1"/>
-          </ns0:nvPr>
-        </ns0:nvSpPr>
-        <ns0:spPr/>
-        <ns0:txBody>
-          <ns1:bodyPr/>
-          <ns1:lstStyle/>
-          <ns1:p>
-            <ns1:r>
-              <ns1:t/>
-            </ns1:r>
-          </ns1:p>
-        </ns0:txBody>
-      </ns0:sp>
-      <ns0:sp>
-        <ns0:nvSpPr>
-          <ns0:cNvPr id="4" name="Slide Number Placeholder 3"/>
-          <ns0:cNvSpPr>
-            <ns1:spLocks noGrp="1"/>
-          </ns0:cNvSpPr>
-          <ns0:nvPr>
-            <ns0:ph type="sldNum" idx="5"/>
-          </ns0:nvPr>
-        </ns0:nvSpPr>
-        <ns0:spPr/>
-        <ns0:txBody>
-          <ns1:bodyPr/>
-          <ns1:lstStyle/>
-          <ns1:p/>
-        </ns0:txBody>
-      </ns0:sp>
-    </ns0:spTree>
-  </ns0:cSld>
-  <ns0:clrMapOvr>
-    <ns1:masterClrMapping/>
-  </ns0:clrMapOvr>
-</ns0:notes>
-</file>
-
-<file path=ppt/notesSlides/notesSlide34.xml><?xml version="1.0" encoding="utf-8"?>
-<ns0:notes xmlns:ns0="http://schemas.openxmlformats.org/presentationml/2006/main" xmlns:ns1="http://schemas.openxmlformats.org/drawingml/2006/main">
-  <ns0:cSld>
-    <ns0:spTree>
-      <ns0:nvGrpSpPr>
-        <ns0:cNvPr id="1" name=""/>
-        <ns0:cNvGrpSpPr/>
-        <ns0:nvPr/>
-      </ns0:nvGrpSpPr>
-      <ns0:grpSpPr>
-        <ns1:xfrm/>
-      </ns0:grpSpPr>
-      <ns0:sp>
-        <ns0:nvSpPr>
-          <ns0:cNvPr id="2" name="Slide Image Placeholder 1"/>
-          <ns0:cNvSpPr>
-            <ns1:spLocks noGrp="1"/>
-          </ns0:cNvSpPr>
-          <ns0:nvPr>
-            <ns0:ph type="sldImg" idx="0"/>
-          </ns0:nvPr>
-        </ns0:nvSpPr>
-        <ns0:spPr/>
-      </ns0:sp>
-      <ns0:sp>
-        <ns0:nvSpPr>
-          <ns0:cNvPr id="3" name="Notes Placeholder 2"/>
-          <ns0:cNvSpPr>
-            <ns1:spLocks noGrp="1"/>
-          </ns0:cNvSpPr>
-          <ns0:nvPr>
-            <ns0:ph type="body" idx="1"/>
-          </ns0:nvPr>
-        </ns0:nvSpPr>
-        <ns0:spPr/>
-        <ns0:txBody>
-          <ns1:bodyPr/>
-          <ns1:lstStyle/>
-          <ns1:p>
-            <ns1:r>
-              <ns1:t/>
-            </ns1:r>
-          </ns1:p>
-        </ns0:txBody>
-      </ns0:sp>
-      <ns0:sp>
-        <ns0:nvSpPr>
-          <ns0:cNvPr id="4" name="Slide Number Placeholder 3"/>
-          <ns0:cNvSpPr>
-            <ns1:spLocks noGrp="1"/>
-          </ns0:cNvSpPr>
-          <ns0:nvPr>
-            <ns0:ph type="sldNum" idx="5"/>
-          </ns0:nvPr>
-        </ns0:nvSpPr>
-        <ns0:spPr/>
-        <ns0:txBody>
-          <ns1:bodyPr/>
-          <ns1:lstStyle/>
-          <ns1:p/>
-        </ns0:txBody>
-      </ns0:sp>
-    </ns0:spTree>
-  </ns0:cSld>
-  <ns0:clrMapOvr>
-    <ns1:masterClrMapping/>
-  </ns0:clrMapOvr>
-</ns0:notes>
-</file>
-
-<file path=ppt/notesSlides/notesSlide35.xml><?xml version="1.0" encoding="utf-8"?>
-<ns0:notes xmlns:ns0="http://schemas.openxmlformats.org/presentationml/2006/main" xmlns:ns1="http://schemas.openxmlformats.org/drawingml/2006/main">
-  <ns0:cSld>
-    <ns0:spTree>
-      <ns0:nvGrpSpPr>
-        <ns0:cNvPr id="1" name=""/>
-        <ns0:cNvGrpSpPr/>
-        <ns0:nvPr/>
-      </ns0:nvGrpSpPr>
-      <ns0:grpSpPr>
-        <ns1:xfrm/>
-      </ns0:grpSpPr>
-      <ns0:sp>
-        <ns0:nvSpPr>
-          <ns0:cNvPr id="2" name="Slide Image Placeholder 1"/>
-          <ns0:cNvSpPr>
-            <ns1:spLocks noGrp="1"/>
-          </ns0:cNvSpPr>
-          <ns0:nvPr>
-            <ns0:ph type="sldImg" idx="0"/>
-          </ns0:nvPr>
-        </ns0:nvSpPr>
-        <ns0:spPr/>
-      </ns0:sp>
-      <ns0:sp>
-        <ns0:nvSpPr>
-          <ns0:cNvPr id="3" name="Notes Placeholder 2"/>
-          <ns0:cNvSpPr>
-            <ns1:spLocks noGrp="1"/>
-          </ns0:cNvSpPr>
-          <ns0:nvPr>
-            <ns0:ph type="body" idx="1"/>
-          </ns0:nvPr>
-        </ns0:nvSpPr>
-        <ns0:spPr/>
-        <ns0:txBody>
-          <ns1:bodyPr/>
-          <ns1:lstStyle/>
-          <ns1:p>
-            <ns1:r>
-              <ns1:t/>
-            </ns1:r>
-          </ns1:p>
-        </ns0:txBody>
-      </ns0:sp>
-      <ns0:sp>
-        <ns0:nvSpPr>
-          <ns0:cNvPr id="4" name="Slide Number Placeholder 3"/>
-          <ns0:cNvSpPr>
-            <ns1:spLocks noGrp="1"/>
-          </ns0:cNvSpPr>
-          <ns0:nvPr>
-            <ns0:ph type="sldNum" idx="5"/>
-          </ns0:nvPr>
-        </ns0:nvSpPr>
-        <ns0:spPr/>
-        <ns0:txBody>
-          <ns1:bodyPr/>
-          <ns1:lstStyle/>
-          <ns1:p/>
-        </ns0:txBody>
-      </ns0:sp>
-    </ns0:spTree>
-  </ns0:cSld>
-  <ns0:clrMapOvr>
-    <ns1:masterClrMapping/>
-  </ns0:clrMapOvr>
-</ns0:notes>
-</file>
-
-<file path=ppt/notesSlides/notesSlide36.xml><?xml version="1.0" encoding="utf-8"?>
-<ns0:notes xmlns:ns0="http://schemas.openxmlformats.org/presentationml/2006/main" xmlns:ns1="http://schemas.openxmlformats.org/drawingml/2006/main">
-  <ns0:cSld>
-    <ns0:spTree>
-      <ns0:nvGrpSpPr>
-        <ns0:cNvPr id="1" name=""/>
-        <ns0:cNvGrpSpPr/>
-        <ns0:nvPr/>
-      </ns0:nvGrpSpPr>
-      <ns0:grpSpPr>
-        <ns1:xfrm/>
-      </ns0:grpSpPr>
-      <ns0:sp>
-        <ns0:nvSpPr>
-          <ns0:cNvPr id="2" name="Slide Image Placeholder 1"/>
-          <ns0:cNvSpPr>
-            <ns1:spLocks noGrp="1"/>
-          </ns0:cNvSpPr>
-          <ns0:nvPr>
-            <ns0:ph type="sldImg" idx="0"/>
-          </ns0:nvPr>
-        </ns0:nvSpPr>
-        <ns0:spPr/>
-      </ns0:sp>
-      <ns0:sp>
-        <ns0:nvSpPr>
-          <ns0:cNvPr id="3" name="Notes Placeholder 2"/>
-          <ns0:cNvSpPr>
-            <ns1:spLocks noGrp="1"/>
-          </ns0:cNvSpPr>
-          <ns0:nvPr>
-            <ns0:ph type="body" idx="1"/>
-          </ns0:nvPr>
-        </ns0:nvSpPr>
-        <ns0:spPr/>
-        <ns0:txBody>
-          <ns1:bodyPr/>
-          <ns1:lstStyle/>
-          <ns1:p>
-            <ns1:r>
-              <ns1:t/>
-            </ns1:r>
-          </ns1:p>
-        </ns0:txBody>
-      </ns0:sp>
-      <ns0:sp>
-        <ns0:nvSpPr>
-          <ns0:cNvPr id="4" name="Slide Number Placeholder 3"/>
-          <ns0:cNvSpPr>
-            <ns1:spLocks noGrp="1"/>
-          </ns0:cNvSpPr>
-          <ns0:nvPr>
-            <ns0:ph type="sldNum" idx="5"/>
-          </ns0:nvPr>
-        </ns0:nvSpPr>
-        <ns0:spPr/>
-        <ns0:txBody>
-          <ns1:bodyPr/>
-          <ns1:lstStyle/>
-          <ns1:p/>
-        </ns0:txBody>
-      </ns0:sp>
-    </ns0:spTree>
-  </ns0:cSld>
-  <ns0:clrMapOvr>
-    <ns1:masterClrMapping/>
-  </ns0:clrMapOvr>
-</ns0:notes>
-</file>
-
-<file path=ppt/notesSlides/notesSlide37.xml><?xml version="1.0" encoding="utf-8"?>
-<ns0:notes xmlns:ns0="http://schemas.openxmlformats.org/presentationml/2006/main" xmlns:ns1="http://schemas.openxmlformats.org/drawingml/2006/main">
-  <ns0:cSld>
-    <ns0:spTree>
-      <ns0:nvGrpSpPr>
-        <ns0:cNvPr id="1" name=""/>
-        <ns0:cNvGrpSpPr/>
-        <ns0:nvPr/>
-      </ns0:nvGrpSpPr>
-      <ns0:grpSpPr>
-        <ns1:xfrm/>
-      </ns0:grpSpPr>
-      <ns0:sp>
-        <ns0:nvSpPr>
-          <ns0:cNvPr id="2" name="Slide Image Placeholder 1"/>
-          <ns0:cNvSpPr>
-            <ns1:spLocks noGrp="1"/>
-          </ns0:cNvSpPr>
-          <ns0:nvPr>
-            <ns0:ph type="sldImg" idx="0"/>
-          </ns0:nvPr>
-        </ns0:nvSpPr>
-        <ns0:spPr/>
-      </ns0:sp>
-      <ns0:sp>
-        <ns0:nvSpPr>
-          <ns0:cNvPr id="3" name="Notes Placeholder 2"/>
-          <ns0:cNvSpPr>
-            <ns1:spLocks noGrp="1"/>
-          </ns0:cNvSpPr>
-          <ns0:nvPr>
-            <ns0:ph type="body" idx="1"/>
-          </ns0:nvPr>
-        </ns0:nvSpPr>
-        <ns0:spPr/>
-        <ns0:txBody>
-          <ns1:bodyPr/>
-          <ns1:lstStyle/>
-          <ns1:p>
-            <ns1:r>
-              <ns1:t/>
-            </ns1:r>
-          </ns1:p>
-        </ns0:txBody>
-      </ns0:sp>
-      <ns0:sp>
-        <ns0:nvSpPr>
-          <ns0:cNvPr id="4" name="Slide Number Placeholder 3"/>
-          <ns0:cNvSpPr>
-            <ns1:spLocks noGrp="1"/>
-          </ns0:cNvSpPr>
-          <ns0:nvPr>
-            <ns0:ph type="sldNum" idx="5"/>
-          </ns0:nvPr>
-        </ns0:nvSpPr>
-        <ns0:spPr/>
-        <ns0:txBody>
-          <ns1:bodyPr/>
-          <ns1:lstStyle/>
-          <ns1:p/>
-        </ns0:txBody>
-      </ns0:sp>
-    </ns0:spTree>
-  </ns0:cSld>
-  <ns0:clrMapOvr>
-    <ns1:masterClrMapping/>
-  </ns0:clrMapOvr>
-</ns0:notes>
-</file>
-
-<file path=ppt/notesSlides/notesSlide38.xml><?xml version="1.0" encoding="utf-8"?>
-<ns0:notes xmlns:ns0="http://schemas.openxmlformats.org/presentationml/2006/main" xmlns:ns1="http://schemas.openxmlformats.org/drawingml/2006/main">
-  <ns0:cSld>
-    <ns0:spTree>
-      <ns0:nvGrpSpPr>
-        <ns0:cNvPr id="1" name=""/>
-        <ns0:cNvGrpSpPr/>
-        <ns0:nvPr/>
-      </ns0:nvGrpSpPr>
-      <ns0:grpSpPr>
-        <ns1:xfrm/>
-      </ns0:grpSpPr>
-      <ns0:sp>
-        <ns0:nvSpPr>
-          <ns0:cNvPr id="2" name="Slide Image Placeholder 1"/>
-          <ns0:cNvSpPr>
-            <ns1:spLocks noGrp="1"/>
-          </ns0:cNvSpPr>
-          <ns0:nvPr>
-            <ns0:ph type="sldImg" idx="0"/>
-          </ns0:nvPr>
-        </ns0:nvSpPr>
-        <ns0:spPr/>
-      </ns0:sp>
-      <ns0:sp>
-        <ns0:nvSpPr>
-          <ns0:cNvPr id="3" name="Notes Placeholder 2"/>
-          <ns0:cNvSpPr>
-            <ns1:spLocks noGrp="1"/>
-          </ns0:cNvSpPr>
-          <ns0:nvPr>
-            <ns0:ph type="body" idx="1"/>
-          </ns0:nvPr>
-        </ns0:nvSpPr>
-        <ns0:spPr/>
-        <ns0:txBody>
-          <ns1:bodyPr/>
-          <ns1:lstStyle/>
-          <ns1:p>
-            <ns1:r>
-              <ns1:t/>
-            </ns1:r>
-          </ns1:p>
-        </ns0:txBody>
-      </ns0:sp>
-      <ns0:sp>
-        <ns0:nvSpPr>
-          <ns0:cNvPr id="4" name="Slide Number Placeholder 3"/>
-          <ns0:cNvSpPr>
-            <ns1:spLocks noGrp="1"/>
-          </ns0:cNvSpPr>
-          <ns0:nvPr>
-            <ns0:ph type="sldNum" idx="5"/>
-          </ns0:nvPr>
-        </ns0:nvSpPr>
-        <ns0:spPr/>
-        <ns0:txBody>
-          <ns1:bodyPr/>
-          <ns1:lstStyle/>
-          <ns1:p/>
-        </ns0:txBody>
-      </ns0:sp>
-    </ns0:spTree>
-  </ns0:cSld>
-  <ns0:clrMapOvr>
-    <ns1:masterClrMapping/>
-  </ns0:clrMapOvr>
-</ns0:notes>
-</file>
-
-<file path=ppt/notesSlides/notesSlide39.xml><?xml version="1.0" encoding="utf-8"?>
-<ns0:notes xmlns:ns0="http://schemas.openxmlformats.org/presentationml/2006/main" xmlns:ns1="http://schemas.openxmlformats.org/drawingml/2006/main">
-  <ns0:cSld>
-    <ns0:spTree>
-      <ns0:nvGrpSpPr>
-        <ns0:cNvPr id="1" name=""/>
-        <ns0:cNvGrpSpPr/>
-        <ns0:nvPr/>
-      </ns0:nvGrpSpPr>
-      <ns0:grpSpPr>
-        <ns1:xfrm/>
-      </ns0:grpSpPr>
-      <ns0:sp>
-        <ns0:nvSpPr>
-          <ns0:cNvPr id="2" name="Slide Image Placeholder 1"/>
-          <ns0:cNvSpPr>
-            <ns1:spLocks noGrp="1"/>
-          </ns0:cNvSpPr>
-          <ns0:nvPr>
-            <ns0:ph type="sldImg" idx="0"/>
-          </ns0:nvPr>
-        </ns0:nvSpPr>
-        <ns0:spPr/>
-      </ns0:sp>
-      <ns0:sp>
-        <ns0:nvSpPr>
-          <ns0:cNvPr id="3" name="Notes Placeholder 2"/>
-          <ns0:cNvSpPr>
-            <ns1:spLocks noGrp="1"/>
-          </ns0:cNvSpPr>
-          <ns0:nvPr>
-            <ns0:ph type="body" idx="1"/>
-          </ns0:nvPr>
-        </ns0:nvSpPr>
-        <ns0:spPr/>
-        <ns0:txBody>
-          <ns1:bodyPr/>
-          <ns1:lstStyle/>
-          <ns1:p>
-            <ns1:r>
-              <ns1:t/>
-            </ns1:r>
-          </ns1:p>
-        </ns0:txBody>
-      </ns0:sp>
-      <ns0:sp>
-        <ns0:nvSpPr>
-          <ns0:cNvPr id="4" name="Slide Number Placeholder 3"/>
-          <ns0:cNvSpPr>
-            <ns1:spLocks noGrp="1"/>
-          </ns0:cNvSpPr>
-          <ns0:nvPr>
-            <ns0:ph type="sldNum" idx="5"/>
-          </ns0:nvPr>
-        </ns0:nvSpPr>
-        <ns0:spPr/>
-        <ns0:txBody>
-          <ns1:bodyPr/>
-          <ns1:lstStyle/>
-          <ns1:p/>
-        </ns0:txBody>
-      </ns0:sp>
-    </ns0:spTree>
-  </ns0:cSld>
-  <ns0:clrMapOvr>
-    <ns1:masterClrMapping/>
-  </ns0:clrMapOvr>
-</ns0:notes>
-</file>
-
-<file path=ppt/notesSlides/notesSlide4.xml><?xml version="1.0" encoding="utf-8"?>
-<ns0:notes xmlns:ns0="http://schemas.openxmlformats.org/presentationml/2006/main" xmlns:ns1="http://schemas.openxmlformats.org/drawingml/2006/main">
-  <ns0:cSld>
-    <ns0:spTree>
-      <ns0:nvGrpSpPr>
-        <ns0:cNvPr id="1" name=""/>
-        <ns0:cNvGrpSpPr/>
-        <ns0:nvPr/>
-      </ns0:nvGrpSpPr>
-      <ns0:grpSpPr>
-        <ns1:xfrm/>
-      </ns0:grpSpPr>
-      <ns0:sp>
-        <ns0:nvSpPr>
-          <ns0:cNvPr id="2" name="Slide Image Placeholder 1"/>
-          <ns0:cNvSpPr>
-            <ns1:spLocks noGrp="1"/>
-          </ns0:cNvSpPr>
-          <ns0:nvPr>
-            <ns0:ph type="sldImg" idx="0"/>
-          </ns0:nvPr>
-        </ns0:nvSpPr>
-        <ns0:spPr/>
-      </ns0:sp>
-      <ns0:sp>
-        <ns0:nvSpPr>
-          <ns0:cNvPr id="3" name="Notes Placeholder 2"/>
-          <ns0:cNvSpPr>
-            <ns1:spLocks noGrp="1"/>
-          </ns0:cNvSpPr>
-          <ns0:nvPr>
-            <ns0:ph type="body" idx="1"/>
-          </ns0:nvPr>
-        </ns0:nvSpPr>
-        <ns0:spPr/>
-        <ns0:txBody>
-          <ns1:bodyPr/>
-          <ns1:lstStyle/>
-          <ns1:p>
-            <ns1:r>
-              <ns1:t/>
-            </ns1:r>
-          </ns1:p>
-        </ns0:txBody>
-      </ns0:sp>
-      <ns0:sp>
-        <ns0:nvSpPr>
-          <ns0:cNvPr id="4" name="Slide Number Placeholder 3"/>
-          <ns0:cNvSpPr>
-            <ns1:spLocks noGrp="1"/>
-          </ns0:cNvSpPr>
-          <ns0:nvPr>
-            <ns0:ph type="sldNum" idx="5"/>
-          </ns0:nvPr>
-        </ns0:nvSpPr>
-        <ns0:spPr/>
-        <ns0:txBody>
-          <ns1:bodyPr/>
-          <ns1:lstStyle/>
-          <ns1:p/>
-        </ns0:txBody>
-      </ns0:sp>
-    </ns0:spTree>
-  </ns0:cSld>
-  <ns0:clrMapOvr>
-    <ns1:masterClrMapping/>
-  </ns0:clrMapOvr>
-</ns0:notes>
-</file>
-
-<file path=ppt/notesSlides/notesSlide40.xml><?xml version="1.0" encoding="utf-8"?>
-<ns0:notes xmlns:ns0="http://schemas.openxmlformats.org/presentationml/2006/main" xmlns:ns1="http://schemas.openxmlformats.org/drawingml/2006/main">
-  <ns0:cSld>
-    <ns0:spTree>
-      <ns0:nvGrpSpPr>
-        <ns0:cNvPr id="1" name=""/>
-        <ns0:cNvGrpSpPr/>
-        <ns0:nvPr/>
-      </ns0:nvGrpSpPr>
-      <ns0:grpSpPr>
-        <ns1:xfrm/>
-      </ns0:grpSpPr>
-      <ns0:sp>
-        <ns0:nvSpPr>
-          <ns0:cNvPr id="2" name="Slide Image Placeholder 1"/>
-          <ns0:cNvSpPr>
-            <ns1:spLocks noGrp="1"/>
-          </ns0:cNvSpPr>
-          <ns0:nvPr>
-            <ns0:ph type="sldImg" idx="0"/>
-          </ns0:nvPr>
-        </ns0:nvSpPr>
-        <ns0:spPr/>
-      </ns0:sp>
-      <ns0:sp>
-        <ns0:nvSpPr>
-          <ns0:cNvPr id="3" name="Notes Placeholder 2"/>
-          <ns0:cNvSpPr>
-            <ns1:spLocks noGrp="1"/>
-          </ns0:cNvSpPr>
-          <ns0:nvPr>
-            <ns0:ph type="body" idx="1"/>
-          </ns0:nvPr>
-        </ns0:nvSpPr>
-        <ns0:spPr/>
-        <ns0:txBody>
-          <ns1:bodyPr/>
-          <ns1:lstStyle/>
-          <ns1:p>
-            <ns1:r>
-              <ns1:t/>
-            </ns1:r>
-          </ns1:p>
-        </ns0:txBody>
-      </ns0:sp>
-      <ns0:sp>
-        <ns0:nvSpPr>
-          <ns0:cNvPr id="4" name="Slide Number Placeholder 3"/>
-          <ns0:cNvSpPr>
-            <ns1:spLocks noGrp="1"/>
-          </ns0:cNvSpPr>
-          <ns0:nvPr>
-            <ns0:ph type="sldNum" idx="5"/>
-          </ns0:nvPr>
-        </ns0:nvSpPr>
-        <ns0:spPr/>
-        <ns0:txBody>
-          <ns1:bodyPr/>
-          <ns1:lstStyle/>
-          <ns1:p/>
-        </ns0:txBody>
-      </ns0:sp>
-    </ns0:spTree>
-  </ns0:cSld>
-  <ns0:clrMapOvr>
-    <ns1:masterClrMapping/>
-  </ns0:clrMapOvr>
-</ns0:notes>
-</file>
-
-<file path=ppt/notesSlides/notesSlide5.xml><?xml version="1.0" encoding="utf-8"?>
-<ns0:notes xmlns:ns0="http://schemas.openxmlformats.org/presentationml/2006/main" xmlns:ns1="http://schemas.openxmlformats.org/drawingml/2006/main">
-  <ns0:cSld>
-    <ns0:spTree>
-      <ns0:nvGrpSpPr>
-        <ns0:cNvPr id="1" name=""/>
-        <ns0:cNvGrpSpPr/>
-        <ns0:nvPr/>
-      </ns0:nvGrpSpPr>
-      <ns0:grpSpPr>
-        <ns1:xfrm/>
-      </ns0:grpSpPr>
-      <ns0:sp>
-        <ns0:nvSpPr>
-          <ns0:cNvPr id="2" name="Slide Image Placeholder 1"/>
-          <ns0:cNvSpPr>
-            <ns1:spLocks noGrp="1"/>
-          </ns0:cNvSpPr>
-          <ns0:nvPr>
-            <ns0:ph type="sldImg" idx="0"/>
-          </ns0:nvPr>
-        </ns0:nvSpPr>
-        <ns0:spPr/>
-      </ns0:sp>
-      <ns0:sp>
-        <ns0:nvSpPr>
-          <ns0:cNvPr id="3" name="Notes Placeholder 2"/>
-          <ns0:cNvSpPr>
-            <ns1:spLocks noGrp="1"/>
-          </ns0:cNvSpPr>
-          <ns0:nvPr>
-            <ns0:ph type="body" idx="1"/>
-          </ns0:nvPr>
-        </ns0:nvSpPr>
-        <ns0:spPr/>
-        <ns0:txBody>
-          <ns1:bodyPr/>
-          <ns1:lstStyle/>
-          <ns1:p>
-            <ns1:r>
-              <ns1:t/>
-            </ns1:r>
-          </ns1:p>
-        </ns0:txBody>
-      </ns0:sp>
-      <ns0:sp>
-        <ns0:nvSpPr>
-          <ns0:cNvPr id="4" name="Slide Number Placeholder 3"/>
-          <ns0:cNvSpPr>
-            <ns1:spLocks noGrp="1"/>
-          </ns0:cNvSpPr>
-          <ns0:nvPr>
-            <ns0:ph type="sldNum" idx="5"/>
-          </ns0:nvPr>
-        </ns0:nvSpPr>
-        <ns0:spPr/>
-        <ns0:txBody>
-          <ns1:bodyPr/>
-          <ns1:lstStyle/>
-          <ns1:p/>
-        </ns0:txBody>
-      </ns0:sp>
-    </ns0:spTree>
-  </ns0:cSld>
-  <ns0:clrMapOvr>
-    <ns1:masterClrMapping/>
-  </ns0:clrMapOvr>
-</ns0:notes>
-</file>
-
-<file path=ppt/notesSlides/notesSlide6.xml><?xml version="1.0" encoding="utf-8"?>
-<ns0:notes xmlns:ns0="http://schemas.openxmlformats.org/presentationml/2006/main" xmlns:ns1="http://schemas.openxmlformats.org/drawingml/2006/main">
-  <ns0:cSld>
-    <ns0:spTree>
-      <ns0:nvGrpSpPr>
-        <ns0:cNvPr id="1" name=""/>
-        <ns0:cNvGrpSpPr/>
-        <ns0:nvPr/>
-      </ns0:nvGrpSpPr>
-      <ns0:grpSpPr>
-        <ns1:xfrm/>
-      </ns0:grpSpPr>
-      <ns0:sp>
-        <ns0:nvSpPr>
-          <ns0:cNvPr id="2" name="Slide Image Placeholder 1"/>
-          <ns0:cNvSpPr>
-            <ns1:spLocks noGrp="1"/>
-          </ns0:cNvSpPr>
-          <ns0:nvPr>
-            <ns0:ph type="sldImg" idx="0"/>
-          </ns0:nvPr>
-        </ns0:nvSpPr>
-        <ns0:spPr/>
-      </ns0:sp>
-      <ns0:sp>
-        <ns0:nvSpPr>
-          <ns0:cNvPr id="3" name="Notes Placeholder 2"/>
-          <ns0:cNvSpPr>
-            <ns1:spLocks noGrp="1"/>
-          </ns0:cNvSpPr>
-          <ns0:nvPr>
-            <ns0:ph type="body" idx="1"/>
-          </ns0:nvPr>
-        </ns0:nvSpPr>
-        <ns0:spPr/>
-        <ns0:txBody>
-          <ns1:bodyPr/>
-          <ns1:lstStyle/>
-          <ns1:p>
-            <ns1:r>
-              <ns1:t/>
-            </ns1:r>
-          </ns1:p>
-        </ns0:txBody>
-      </ns0:sp>
-      <ns0:sp>
-        <ns0:nvSpPr>
-          <ns0:cNvPr id="4" name="Slide Number Placeholder 3"/>
-          <ns0:cNvSpPr>
-            <ns1:spLocks noGrp="1"/>
-          </ns0:cNvSpPr>
-          <ns0:nvPr>
-            <ns0:ph type="sldNum" idx="5"/>
-          </ns0:nvPr>
-        </ns0:nvSpPr>
-        <ns0:spPr/>
-        <ns0:txBody>
-          <ns1:bodyPr/>
-          <ns1:lstStyle/>
-          <ns1:p/>
-        </ns0:txBody>
-      </ns0:sp>
-    </ns0:spTree>
-  </ns0:cSld>
-  <ns0:clrMapOvr>
-    <ns1:masterClrMapping/>
-  </ns0:clrMapOvr>
-</ns0:notes>
-</file>
-
-<file path=ppt/notesSlides/notesSlide7.xml><?xml version="1.0" encoding="utf-8"?>
-<ns0:notes xmlns:ns0="http://schemas.openxmlformats.org/presentationml/2006/main" xmlns:ns1="http://schemas.openxmlformats.org/drawingml/2006/main">
-  <ns0:cSld>
-    <ns0:spTree>
-      <ns0:nvGrpSpPr>
-        <ns0:cNvPr id="1" name=""/>
-        <ns0:cNvGrpSpPr/>
-        <ns0:nvPr/>
-      </ns0:nvGrpSpPr>
-      <ns0:grpSpPr>
-        <ns1:xfrm/>
-      </ns0:grpSpPr>
-      <ns0:sp>
-        <ns0:nvSpPr>
-          <ns0:cNvPr id="2" name="Slide Image Placeholder 1"/>
-          <ns0:cNvSpPr>
-            <ns1:spLocks noGrp="1"/>
-          </ns0:cNvSpPr>
-          <ns0:nvPr>
-            <ns0:ph type="sldImg" idx="0"/>
-          </ns0:nvPr>
-        </ns0:nvSpPr>
-        <ns0:spPr/>
-      </ns0:sp>
-      <ns0:sp>
-        <ns0:nvSpPr>
-          <ns0:cNvPr id="3" name="Notes Placeholder 2"/>
-          <ns0:cNvSpPr>
-            <ns1:spLocks noGrp="1"/>
-          </ns0:cNvSpPr>
-          <ns0:nvPr>
-            <ns0:ph type="body" idx="1"/>
-          </ns0:nvPr>
-        </ns0:nvSpPr>
-        <ns0:spPr/>
-        <ns0:txBody>
-          <ns1:bodyPr/>
-          <ns1:lstStyle/>
-          <ns1:p>
-            <ns1:r>
-              <ns1:t/>
-            </ns1:r>
-          </ns1:p>
-        </ns0:txBody>
-      </ns0:sp>
-      <ns0:sp>
-        <ns0:nvSpPr>
-          <ns0:cNvPr id="4" name="Slide Number Placeholder 3"/>
-          <ns0:cNvSpPr>
-            <ns1:spLocks noGrp="1"/>
-          </ns0:cNvSpPr>
-          <ns0:nvPr>
-            <ns0:ph type="sldNum" idx="5"/>
-          </ns0:nvPr>
-        </ns0:nvSpPr>
-        <ns0:spPr/>
-        <ns0:txBody>
-          <ns1:bodyPr/>
-          <ns1:lstStyle/>
-          <ns1:p/>
-        </ns0:txBody>
-      </ns0:sp>
-    </ns0:spTree>
-  </ns0:cSld>
-  <ns0:clrMapOvr>
-    <ns1:masterClrMapping/>
-  </ns0:clrMapOvr>
-</ns0:notes>
-</file>
-
-<file path=ppt/notesSlides/notesSlide8.xml><?xml version="1.0" encoding="utf-8"?>
-<ns0:notes xmlns:ns0="http://schemas.openxmlformats.org/presentationml/2006/main" xmlns:ns1="http://schemas.openxmlformats.org/drawingml/2006/main">
-  <ns0:cSld>
-    <ns0:spTree>
-      <ns0:nvGrpSpPr>
-        <ns0:cNvPr id="1" name=""/>
-        <ns0:cNvGrpSpPr/>
-        <ns0:nvPr/>
-      </ns0:nvGrpSpPr>
-      <ns0:grpSpPr>
-        <ns1:xfrm/>
-      </ns0:grpSpPr>
-      <ns0:sp>
-        <ns0:nvSpPr>
-          <ns0:cNvPr id="2" name="Slide Image Placeholder 1"/>
-          <ns0:cNvSpPr>
-            <ns1:spLocks noGrp="1"/>
-          </ns0:cNvSpPr>
-          <ns0:nvPr>
-            <ns0:ph type="sldImg" idx="0"/>
-          </ns0:nvPr>
-        </ns0:nvSpPr>
-        <ns0:spPr/>
-      </ns0:sp>
-      <ns0:sp>
-        <ns0:nvSpPr>
-          <ns0:cNvPr id="3" name="Notes Placeholder 2"/>
-          <ns0:cNvSpPr>
-            <ns1:spLocks noGrp="1"/>
-          </ns0:cNvSpPr>
-          <ns0:nvPr>
-            <ns0:ph type="body" idx="1"/>
-          </ns0:nvPr>
-        </ns0:nvSpPr>
-        <ns0:spPr/>
-        <ns0:txBody>
-          <ns1:bodyPr/>
-          <ns1:lstStyle/>
-          <ns1:p>
-            <ns1:r>
-              <ns1:t/>
-            </ns1:r>
-          </ns1:p>
-        </ns0:txBody>
-      </ns0:sp>
-      <ns0:sp>
-        <ns0:nvSpPr>
-          <ns0:cNvPr id="4" name="Slide Number Placeholder 3"/>
-          <ns0:cNvSpPr>
-            <ns1:spLocks noGrp="1"/>
-          </ns0:cNvSpPr>
-          <ns0:nvPr>
-            <ns0:ph type="sldNum" idx="5"/>
-          </ns0:nvPr>
-        </ns0:nvSpPr>
-        <ns0:spPr/>
-        <ns0:txBody>
-          <ns1:bodyPr/>
-          <ns1:lstStyle/>
-          <ns1:p/>
-        </ns0:txBody>
-      </ns0:sp>
-    </ns0:spTree>
-  </ns0:cSld>
-  <ns0:clrMapOvr>
-    <ns1:masterClrMapping/>
-  </ns0:clrMapOvr>
-</ns0:notes>
-</file>
-
-<file path=ppt/notesSlides/notesSlide9.xml><?xml version="1.0" encoding="utf-8"?>
-<ns0:notes xmlns:ns0="http://schemas.openxmlformats.org/presentationml/2006/main" xmlns:ns1="http://schemas.openxmlformats.org/drawingml/2006/main">
-  <ns0:cSld>
-    <ns0:spTree>
-      <ns0:nvGrpSpPr>
-        <ns0:cNvPr id="1" name=""/>
-        <ns0:cNvGrpSpPr/>
-        <ns0:nvPr/>
-      </ns0:nvGrpSpPr>
-      <ns0:grpSpPr>
-        <ns1:xfrm/>
-      </ns0:grpSpPr>
-      <ns0:sp>
-        <ns0:nvSpPr>
-          <ns0:cNvPr id="2" name="Slide Image Placeholder 1"/>
-          <ns0:cNvSpPr>
-            <ns1:spLocks noGrp="1"/>
-          </ns0:cNvSpPr>
-          <ns0:nvPr>
-            <ns0:ph type="sldImg" idx="0"/>
-          </ns0:nvPr>
-        </ns0:nvSpPr>
-        <ns0:spPr/>
-      </ns0:sp>
-      <ns0:sp>
-        <ns0:nvSpPr>
-          <ns0:cNvPr id="3" name="Notes Placeholder 2"/>
-          <ns0:cNvSpPr>
-            <ns1:spLocks noGrp="1"/>
-          </ns0:cNvSpPr>
-          <ns0:nvPr>
-            <ns0:ph type="body" idx="1"/>
-          </ns0:nvPr>
-        </ns0:nvSpPr>
-        <ns0:spPr/>
-        <ns0:txBody>
-          <ns1:bodyPr/>
-          <ns1:lstStyle/>
-          <ns1:p>
-            <ns1:r>
-              <ns1:t/>
-            </ns1:r>
-          </ns1:p>
-        </ns0:txBody>
-      </ns0:sp>
-      <ns0:sp>
-        <ns0:nvSpPr>
-          <ns0:cNvPr id="4" name="Slide Number Placeholder 3"/>
-          <ns0:cNvSpPr>
-            <ns1:spLocks noGrp="1"/>
-          </ns0:cNvSpPr>
-          <ns0:nvPr>
-            <ns0:ph type="sldNum" idx="5"/>
-          </ns0:nvPr>
-        </ns0:nvSpPr>
-        <ns0:spPr/>
-        <ns0:txBody>
-          <ns1:bodyPr/>
-          <ns1:lstStyle/>
-          <ns1:p/>
-        </ns0:txBody>
-      </ns0:sp>
-    </ns0:spTree>
-  </ns0:cSld>
-  <ns0:clrMapOvr>
-    <ns1:masterClrMapping/>
-  </ns0:clrMapOvr>
-</ns0:notes>
 </file>
 
 <file path=ppt/slideLayouts/slideLayout1.xml><?xml version="1.0" encoding="utf-8"?>
@@ -14520,64 +11330,7 @@
                 <a:ea typeface="Arial"/>
                 <a:cs typeface="Arial"/>
               </a:rPr>
-              <a:t>Escribid un axioma y una regla. ¿Qué debería responder?</a:t>
-            </a:r>
-          </a:p>
-        </p:txBody>
-      </p:sp>
-      <p:sp>
-        <p:nvSpPr>
-          <p:cNvPr id="12" name="">
-            <a:extLst xmlns:a="http://schemas.openxmlformats.org/drawingml/2006/main">
-              <a:ext uri="{FF2B5EF4-FFF2-40B4-BE49-F238E27FC236}">
-                <a16:creationId xmlns:a16="http://schemas.microsoft.com/office/drawing/2014/main" id="{8D27FDA0-7D00-457F-BD44-7716CEFACB6C}"/>
-              </a:ext>
-            </a:extLst>
-          </p:cNvPr>
-          <p:cNvSpPr>
-            <a:spLocks xmlns:a="http://schemas.openxmlformats.org/drawingml/2006/main" noGrp="1"/>
-          </p:cNvSpPr>
-          <p:nvPr/>
-        </p:nvSpPr>
-        <p:spPr>
-          <a:xfrm xmlns:a="http://schemas.openxmlformats.org/drawingml/2006/main">
-            <a:off x="822960" y="6089904"/>
-            <a:ext cx="10149840" cy="173736"/>
-          </a:xfrm>
-          <a:prstGeom xmlns:a="http://schemas.openxmlformats.org/drawingml/2006/main" prst="rect">
-            <a:avLst/>
-          </a:prstGeom>
-          <a:noFill xmlns:a="http://schemas.openxmlformats.org/drawingml/2006/main"/>
-          <a:ln xmlns:a="http://schemas.openxmlformats.org/drawingml/2006/main" w="0">
-            <a:noFill/>
-          </a:ln>
-        </p:spPr>
-        <p:txBody>
-          <a:bodyPr xmlns:a="http://schemas.openxmlformats.org/drawingml/2006/main">
-            <a:noAutofit/>
-          </a:bodyPr>
-          <a:lstStyle xmlns:a="http://schemas.openxmlformats.org/drawingml/2006/main"/>
-          <a:p xmlns:a="http://schemas.openxmlformats.org/drawingml/2006/main">
-            <a:pPr algn="l">
-              <a:defRPr sz="864" b="0">
-                <a:solidFill>
-                  <a:srgbClr val="60707B"/>
-                </a:solidFill>
-                <a:latin typeface="Arial"/>
-                <a:ea typeface="Arial"/>
-                <a:cs typeface="Arial"/>
-              </a:defRPr>
-            </a:pPr>
-            <a:r>
-              <a:rPr sz="864" b="0">
-                <a:solidFill>
-                  <a:srgbClr val="60707B"/>
-                </a:solidFill>
-                <a:latin typeface="Arial"/>
-                <a:ea typeface="Arial"/>
-                <a:cs typeface="Arial"/>
-              </a:rPr>
-              <a:t>Razonad primero: todavía no mostramos ni la definición ni las respuestas.</a:t>
+              <a:t>Definid suma/3 y probad las consultas.</a:t>
             </a:r>
           </a:p>
         </p:txBody>
@@ -18557,7 +15310,7 @@
                 <a:ea typeface="Arial"/>
                 <a:cs typeface="Arial"/>
               </a:rPr>
-              <a:t>Escribid el caso base y una regla recursiva.</a:t>
+              <a:t>Definid par/1 y probad las consultas.</a:t>
             </a:r>
           </a:p>
         </p:txBody>
@@ -20005,63 +16758,6 @@
       </p:sp>
       <p:sp>
         <p:nvSpPr>
-          <p:cNvPr id="11" name="">
-            <a:extLst xmlns:a="http://schemas.openxmlformats.org/drawingml/2006/main">
-              <a:ext uri="{FF2B5EF4-FFF2-40B4-BE49-F238E27FC236}">
-                <a16:creationId xmlns:a16="http://schemas.microsoft.com/office/drawing/2014/main" id="{A4ED1825-C2C0-4BC7-8D80-13F48357B0D4}"/>
-              </a:ext>
-            </a:extLst>
-          </p:cNvPr>
-          <p:cNvSpPr>
-            <a:spLocks xmlns:a="http://schemas.openxmlformats.org/drawingml/2006/main" noGrp="1"/>
-          </p:cNvSpPr>
-          <p:nvPr/>
-        </p:nvSpPr>
-        <p:spPr>
-          <a:xfrm xmlns:a="http://schemas.openxmlformats.org/drawingml/2006/main">
-            <a:off x="822960" y="5074920"/>
-            <a:ext cx="10058400" cy="585216"/>
-          </a:xfrm>
-          <a:prstGeom xmlns:a="http://schemas.openxmlformats.org/drawingml/2006/main" prst="rect">
-            <a:avLst/>
-          </a:prstGeom>
-          <a:noFill xmlns:a="http://schemas.openxmlformats.org/drawingml/2006/main"/>
-          <a:ln xmlns:a="http://schemas.openxmlformats.org/drawingml/2006/main" w="0">
-            <a:noFill/>
-          </a:ln>
-        </p:spPr>
-        <p:txBody>
-          <a:bodyPr xmlns:a="http://schemas.openxmlformats.org/drawingml/2006/main">
-            <a:noAutofit/>
-          </a:bodyPr>
-          <a:lstStyle xmlns:a="http://schemas.openxmlformats.org/drawingml/2006/main"/>
-          <a:p xmlns:a="http://schemas.openxmlformats.org/drawingml/2006/main">
-            <a:pPr algn="l">
-              <a:defRPr sz="2088" b="1">
-                <a:solidFill>
-                  <a:srgbClr val="70436F"/>
-                </a:solidFill>
-                <a:latin typeface="Arial"/>
-                <a:ea typeface="Arial"/>
-                <a:cs typeface="Arial"/>
-              </a:defRPr>
-            </a:pPr>
-            <a:r>
-              <a:rPr sz="2088" b="1">
-                <a:solidFill>
-                  <a:srgbClr val="70436F"/>
-                </a:solidFill>
-                <a:latin typeface="Arial"/>
-                <a:ea typeface="Arial"/>
-                <a:cs typeface="Arial"/>
-              </a:rPr>
-              <a:t>¿Qué cambia respecto a par/1? ¿Qué se mantiene?</a:t>
-            </a:r>
-          </a:p>
-        </p:txBody>
-      </p:sp>
-      <p:sp>
-        <p:nvSpPr>
           <p:cNvPr id="12" name="">
             <a:extLst xmlns:a="http://schemas.openxmlformats.org/drawingml/2006/main">
               <a:ext uri="{FF2B5EF4-FFF2-40B4-BE49-F238E27FC236}">
@@ -22314,63 +19010,6 @@
           </a:p>
         </p:txBody>
       </p:sp>
-      <p:sp>
-        <p:nvSpPr>
-          <p:cNvPr id="11" name="">
-            <a:extLst xmlns:a="http://schemas.openxmlformats.org/drawingml/2006/main">
-              <a:ext uri="{FF2B5EF4-FFF2-40B4-BE49-F238E27FC236}">
-                <a16:creationId xmlns:a16="http://schemas.microsoft.com/office/drawing/2014/main" id="{A35F4664-FCF4-4EAA-A26C-5297D6BD225E}"/>
-              </a:ext>
-            </a:extLst>
-          </p:cNvPr>
-          <p:cNvSpPr>
-            <a:spLocks xmlns:a="http://schemas.openxmlformats.org/drawingml/2006/main" noGrp="1"/>
-          </p:cNvSpPr>
-          <p:nvPr/>
-        </p:nvSpPr>
-        <p:spPr>
-          <a:xfrm xmlns:a="http://schemas.openxmlformats.org/drawingml/2006/main">
-            <a:off x="822960" y="5074920"/>
-            <a:ext cx="10058400" cy="585216"/>
-          </a:xfrm>
-          <a:prstGeom xmlns:a="http://schemas.openxmlformats.org/drawingml/2006/main" prst="rect">
-            <a:avLst/>
-          </a:prstGeom>
-          <a:noFill xmlns:a="http://schemas.openxmlformats.org/drawingml/2006/main"/>
-          <a:ln xmlns:a="http://schemas.openxmlformats.org/drawingml/2006/main" w="0">
-            <a:noFill/>
-          </a:ln>
-        </p:spPr>
-        <p:txBody>
-          <a:bodyPr xmlns:a="http://schemas.openxmlformats.org/drawingml/2006/main">
-            <a:noAutofit/>
-          </a:bodyPr>
-          <a:lstStyle xmlns:a="http://schemas.openxmlformats.org/drawingml/2006/main"/>
-          <a:p xmlns:a="http://schemas.openxmlformats.org/drawingml/2006/main">
-            <a:pPr algn="l">
-              <a:defRPr sz="2088" b="1">
-                <a:solidFill>
-                  <a:srgbClr val="70436F"/>
-                </a:solidFill>
-                <a:latin typeface="Arial"/>
-                <a:ea typeface="Arial"/>
-                <a:cs typeface="Arial"/>
-              </a:defRPr>
-            </a:pPr>
-            <a:r>
-              <a:rPr sz="2088" b="1">
-                <a:solidFill>
-                  <a:srgbClr val="70436F"/>
-                </a:solidFill>
-                <a:latin typeface="Arial"/>
-                <a:ea typeface="Arial"/>
-                <a:cs typeface="Arial"/>
-              </a:rPr>
-              <a:t>¿Se puede definir con un solo axioma?</a:t>
-            </a:r>
-          </a:p>
-        </p:txBody>
-      </p:sp>
     </p:spTree>
     <p:extLst>
       <p:ext uri="{BB962C8B-B14F-4D97-AF65-F5344CB8AC3E}">
@@ -23651,7 +20290,7 @@
                 <a:ea typeface="Arial"/>
                 <a:cs typeface="Arial"/>
               </a:rPr>
-              <a:t>Archivo natural.pl</a:t>
+              <a:t>Consola de Prolog</a:t>
             </a:r>
           </a:p>
         </p:txBody>
@@ -23738,7 +20377,7 @@
                 <a:ea typeface="Consolas"/>
                 <a:cs typeface="Consolas"/>
               </a:rPr>
-              <a:t>mult(0,Y,___).</a:t>
+              <a:t>?- mult(s(0),s(s(0)),Z).</a:t>
             </a:r>
           </a:p>
           <a:p xmlns:a="http://schemas.openxmlformats.org/drawingml/2006/main">
@@ -23761,7 +20400,7 @@
                 <a:ea typeface="Consolas"/>
                 <a:cs typeface="Consolas"/>
               </a:rPr>
-              <a:t>mult(s(X),Y,W) :- mult(X,Y,Z), ___.</a:t>
+              <a:t>?- mult(0,s(s(0)),Z).</a:t>
             </a:r>
           </a:p>
         </p:txBody>
@@ -23818,7 +20457,7 @@
                 <a:ea typeface="Arial"/>
                 <a:cs typeface="Arial"/>
               </a:rPr>
-              <a:t>¿Qué hay que sumar al producto X × Y?</a:t>
+              <a:t>Definid mult/3 y probad las consultas.</a:t>
             </a:r>
           </a:p>
         </p:txBody>
@@ -26812,7 +23451,7 @@
                 <a:ea typeface="Arial"/>
                 <a:cs typeface="Arial"/>
               </a:rPr>
-              <a:t>Archivo natural.pl</a:t>
+              <a:t>Consola de Prolog</a:t>
             </a:r>
           </a:p>
         </p:txBody>
@@ -26899,7 +23538,7 @@
                 <a:ea typeface="Consolas"/>
                 <a:cs typeface="Consolas"/>
               </a:rPr>
-              <a:t>exp(X,0,___).</a:t>
+              <a:t>?- exp(s(s(0)),s(s(0)),Z).</a:t>
             </a:r>
           </a:p>
           <a:p xmlns:a="http://schemas.openxmlformats.org/drawingml/2006/main">
@@ -26922,7 +23561,7 @@
                 <a:ea typeface="Consolas"/>
                 <a:cs typeface="Consolas"/>
               </a:rPr>
-              <a:t>exp(X,s(Y),W) :- exp(X,Y,Z), ___.</a:t>
+              <a:t>?- exp(s(s(0)),0,Z).</a:t>
             </a:r>
           </a:p>
         </p:txBody>
@@ -26979,7 +23618,7 @@
                 <a:ea typeface="Arial"/>
                 <a:cs typeface="Arial"/>
               </a:rPr>
-              <a:t>¿Cuál es el caso base? ¿Cómo reutilizamos mult/3?</a:t>
+              <a:t>Definid exp/3 y probad las consultas.</a:t>
             </a:r>
           </a:p>
         </p:txBody>
@@ -28175,21 +24814,21 @@
       </p:graphicFrame>
       <p:sp>
         <p:nvSpPr>
-          <p:cNvPr id="8" name="">
-            <a:extLst xmlns:a="http://schemas.openxmlformats.org/drawingml/2006/main">
-              <a:ext uri="{FF2B5EF4-FFF2-40B4-BE49-F238E27FC236}">
-                <a16:creationId xmlns:a16="http://schemas.microsoft.com/office/drawing/2014/main" id="{21BF5A9A-D7BD-4C13-98D7-E1783802DC2F}"/>
-              </a:ext>
-            </a:extLst>
-          </p:cNvPr>
-          <p:cNvSpPr>
-            <a:spLocks xmlns:a="http://schemas.openxmlformats.org/drawingml/2006/main" noGrp="1"/>
-          </p:cNvSpPr>
-          <p:nvPr/>
-        </p:nvSpPr>
-        <p:spPr>
-          <a:xfrm xmlns:a="http://schemas.openxmlformats.org/drawingml/2006/main">
-            <a:off x="822960" y="2569464"/>
+          <p:cNvPr id="11" name="">
+            <a:extLst xmlns:a="http://schemas.openxmlformats.org/drawingml/2006/main">
+              <a:ext uri="{FF2B5EF4-FFF2-40B4-BE49-F238E27FC236}">
+                <a16:creationId xmlns:a16="http://schemas.microsoft.com/office/drawing/2014/main" id="{F3326602-4916-47BF-BB9A-22FABD147BC9}"/>
+              </a:ext>
+            </a:extLst>
+          </p:cNvPr>
+          <p:cNvSpPr>
+            <a:spLocks xmlns:a="http://schemas.openxmlformats.org/drawingml/2006/main" noGrp="1"/>
+          </p:cNvSpPr>
+          <p:nvPr/>
+        </p:nvSpPr>
+        <p:spPr>
+          <a:xfrm xmlns:a="http://schemas.openxmlformats.org/drawingml/2006/main">
+            <a:off x="822960" y="3703320"/>
             <a:ext cx="10149840" cy="201168"/>
           </a:xfrm>
           <a:prstGeom xmlns:a="http://schemas.openxmlformats.org/drawingml/2006/main" prst="rect">
@@ -28225,29 +24864,29 @@
                 <a:ea typeface="Arial"/>
                 <a:cs typeface="Arial"/>
               </a:rPr>
-              <a:t>Archivo natural.pl</a:t>
-            </a:r>
-          </a:p>
-        </p:txBody>
-      </p:sp>
-      <p:sp>
-        <p:nvSpPr>
-          <p:cNvPr id="9" name="">
-            <a:extLst xmlns:a="http://schemas.openxmlformats.org/drawingml/2006/main">
-              <a:ext uri="{FF2B5EF4-FFF2-40B4-BE49-F238E27FC236}">
-                <a16:creationId xmlns:a16="http://schemas.microsoft.com/office/drawing/2014/main" id="{EFC244B0-CC0B-4C57-BF0C-3554D40E9A19}"/>
-              </a:ext>
-            </a:extLst>
-          </p:cNvPr>
-          <p:cNvSpPr>
-            <a:spLocks xmlns:a="http://schemas.openxmlformats.org/drawingml/2006/main" noGrp="1"/>
-          </p:cNvSpPr>
-          <p:nvPr/>
-        </p:nvSpPr>
-        <p:spPr>
-          <a:xfrm xmlns:a="http://schemas.openxmlformats.org/drawingml/2006/main">
-            <a:off x="822960" y="2798064"/>
-            <a:ext cx="10149840" cy="685800"/>
+              <a:t>Consola de Prolog</a:t>
+            </a:r>
+          </a:p>
+        </p:txBody>
+      </p:sp>
+      <p:sp>
+        <p:nvSpPr>
+          <p:cNvPr id="12" name="">
+            <a:extLst xmlns:a="http://schemas.openxmlformats.org/drawingml/2006/main">
+              <a:ext uri="{FF2B5EF4-FFF2-40B4-BE49-F238E27FC236}">
+                <a16:creationId xmlns:a16="http://schemas.microsoft.com/office/drawing/2014/main" id="{427CD671-41B9-4D03-817E-BEA4CDED1D04}"/>
+              </a:ext>
+            </a:extLst>
+          </p:cNvPr>
+          <p:cNvSpPr>
+            <a:spLocks xmlns:a="http://schemas.openxmlformats.org/drawingml/2006/main" noGrp="1"/>
+          </p:cNvSpPr>
+          <p:nvPr/>
+        </p:nvSpPr>
+        <p:spPr>
+          <a:xfrm xmlns:a="http://schemas.openxmlformats.org/drawingml/2006/main">
+            <a:off x="822960" y="3931920"/>
+            <a:ext cx="10149840" cy="1143000"/>
           </a:xfrm>
           <a:prstGeom xmlns:a="http://schemas.openxmlformats.org/drawingml/2006/main" prst="rect">
             <a:avLst/>
@@ -28262,22 +24901,22 @@
       </p:sp>
       <p:sp>
         <p:nvSpPr>
-          <p:cNvPr id="10" name="">
-            <a:extLst xmlns:a="http://schemas.openxmlformats.org/drawingml/2006/main">
-              <a:ext uri="{FF2B5EF4-FFF2-40B4-BE49-F238E27FC236}">
-                <a16:creationId xmlns:a16="http://schemas.microsoft.com/office/drawing/2014/main" id="{FCFB3809-0A54-4C56-A968-1D85C9228398}"/>
-              </a:ext>
-            </a:extLst>
-          </p:cNvPr>
-          <p:cNvSpPr>
-            <a:spLocks xmlns:a="http://schemas.openxmlformats.org/drawingml/2006/main" noGrp="1"/>
-          </p:cNvSpPr>
-          <p:nvPr/>
-        </p:nvSpPr>
-        <p:spPr>
-          <a:xfrm xmlns:a="http://schemas.openxmlformats.org/drawingml/2006/main">
-            <a:off x="1033272" y="2962656"/>
-            <a:ext cx="9729216" cy="429768"/>
+          <p:cNvPr id="13" name="">
+            <a:extLst xmlns:a="http://schemas.openxmlformats.org/drawingml/2006/main">
+              <a:ext uri="{FF2B5EF4-FFF2-40B4-BE49-F238E27FC236}">
+                <a16:creationId xmlns:a16="http://schemas.microsoft.com/office/drawing/2014/main" id="{74551FEB-D324-429E-9080-CCFBF81E531D}"/>
+              </a:ext>
+            </a:extLst>
+          </p:cNvPr>
+          <p:cNvSpPr>
+            <a:spLocks xmlns:a="http://schemas.openxmlformats.org/drawingml/2006/main" noGrp="1"/>
+          </p:cNvSpPr>
+          <p:nvPr/>
+        </p:nvSpPr>
+        <p:spPr>
+          <a:xfrm xmlns:a="http://schemas.openxmlformats.org/drawingml/2006/main">
+            <a:off x="1033272" y="4096512"/>
+            <a:ext cx="9729216" cy="886968"/>
           </a:xfrm>
           <a:prstGeom xmlns:a="http://schemas.openxmlformats.org/drawingml/2006/main" prst="rect">
             <a:avLst/>
@@ -28312,130 +24951,9 @@
                 <a:ea typeface="Consolas"/>
                 <a:cs typeface="Consolas"/>
               </a:rPr>
-              <a:t>doble(X,Y) :- ______________.</a:t>
-            </a:r>
-          </a:p>
-        </p:txBody>
-      </p:sp>
-      <p:sp>
-        <p:nvSpPr>
-          <p:cNvPr id="11" name="">
-            <a:extLst xmlns:a="http://schemas.openxmlformats.org/drawingml/2006/main">
-              <a:ext uri="{FF2B5EF4-FFF2-40B4-BE49-F238E27FC236}">
-                <a16:creationId xmlns:a16="http://schemas.microsoft.com/office/drawing/2014/main" id="{F3326602-4916-47BF-BB9A-22FABD147BC9}"/>
-              </a:ext>
-            </a:extLst>
-          </p:cNvPr>
-          <p:cNvSpPr>
-            <a:spLocks xmlns:a="http://schemas.openxmlformats.org/drawingml/2006/main" noGrp="1"/>
-          </p:cNvSpPr>
-          <p:nvPr/>
-        </p:nvSpPr>
-        <p:spPr>
-          <a:xfrm xmlns:a="http://schemas.openxmlformats.org/drawingml/2006/main">
-            <a:off x="822960" y="3703320"/>
-            <a:ext cx="10149840" cy="201168"/>
-          </a:xfrm>
-          <a:prstGeom xmlns:a="http://schemas.openxmlformats.org/drawingml/2006/main" prst="rect">
-            <a:avLst/>
-          </a:prstGeom>
-          <a:noFill xmlns:a="http://schemas.openxmlformats.org/drawingml/2006/main"/>
-          <a:ln xmlns:a="http://schemas.openxmlformats.org/drawingml/2006/main" w="0">
-            <a:noFill/>
-          </a:ln>
-        </p:spPr>
-        <p:txBody>
-          <a:bodyPr xmlns:a="http://schemas.openxmlformats.org/drawingml/2006/main">
-            <a:noAutofit/>
-          </a:bodyPr>
-          <a:lstStyle xmlns:a="http://schemas.openxmlformats.org/drawingml/2006/main"/>
-          <a:p xmlns:a="http://schemas.openxmlformats.org/drawingml/2006/main">
-            <a:pPr algn="l">
-              <a:defRPr sz="1080" b="0">
-                <a:solidFill>
-                  <a:srgbClr val="60707B"/>
-                </a:solidFill>
-                <a:latin typeface="Arial"/>
-                <a:ea typeface="Arial"/>
-                <a:cs typeface="Arial"/>
-              </a:defRPr>
-            </a:pPr>
-            <a:r>
-              <a:rPr sz="1080" b="0">
-                <a:solidFill>
-                  <a:srgbClr val="60707B"/>
-                </a:solidFill>
-                <a:latin typeface="Arial"/>
-                <a:ea typeface="Arial"/>
-                <a:cs typeface="Arial"/>
-              </a:rPr>
-              <a:t>Consola de Prolog</a:t>
-            </a:r>
-          </a:p>
-        </p:txBody>
-      </p:sp>
-      <p:sp>
-        <p:nvSpPr>
-          <p:cNvPr id="12" name="">
-            <a:extLst xmlns:a="http://schemas.openxmlformats.org/drawingml/2006/main">
-              <a:ext uri="{FF2B5EF4-FFF2-40B4-BE49-F238E27FC236}">
-                <a16:creationId xmlns:a16="http://schemas.microsoft.com/office/drawing/2014/main" id="{427CD671-41B9-4D03-817E-BEA4CDED1D04}"/>
-              </a:ext>
-            </a:extLst>
-          </p:cNvPr>
-          <p:cNvSpPr>
-            <a:spLocks xmlns:a="http://schemas.openxmlformats.org/drawingml/2006/main" noGrp="1"/>
-          </p:cNvSpPr>
-          <p:nvPr/>
-        </p:nvSpPr>
-        <p:spPr>
-          <a:xfrm xmlns:a="http://schemas.openxmlformats.org/drawingml/2006/main">
-            <a:off x="822960" y="3931920"/>
-            <a:ext cx="10149840" cy="1143000"/>
-          </a:xfrm>
-          <a:prstGeom xmlns:a="http://schemas.openxmlformats.org/drawingml/2006/main" prst="rect">
-            <a:avLst/>
-          </a:prstGeom>
-          <a:solidFill xmlns:a="http://schemas.openxmlformats.org/drawingml/2006/main">
-            <a:srgbClr val="F5EFF5"/>
-          </a:solidFill>
-          <a:ln xmlns:a="http://schemas.openxmlformats.org/drawingml/2006/main" w="0">
-            <a:noFill/>
-          </a:ln>
-        </p:spPr>
-      </p:sp>
-      <p:sp>
-        <p:nvSpPr>
-          <p:cNvPr id="13" name="">
-            <a:extLst xmlns:a="http://schemas.openxmlformats.org/drawingml/2006/main">
-              <a:ext uri="{FF2B5EF4-FFF2-40B4-BE49-F238E27FC236}">
-                <a16:creationId xmlns:a16="http://schemas.microsoft.com/office/drawing/2014/main" id="{74551FEB-D324-429E-9080-CCFBF81E531D}"/>
-              </a:ext>
-            </a:extLst>
-          </p:cNvPr>
-          <p:cNvSpPr>
-            <a:spLocks xmlns:a="http://schemas.openxmlformats.org/drawingml/2006/main" noGrp="1"/>
-          </p:cNvSpPr>
-          <p:nvPr/>
-        </p:nvSpPr>
-        <p:spPr>
-          <a:xfrm xmlns:a="http://schemas.openxmlformats.org/drawingml/2006/main">
-            <a:off x="1033272" y="4096512"/>
-            <a:ext cx="9729216" cy="886968"/>
-          </a:xfrm>
-          <a:prstGeom xmlns:a="http://schemas.openxmlformats.org/drawingml/2006/main" prst="rect">
-            <a:avLst/>
-          </a:prstGeom>
-          <a:noFill xmlns:a="http://schemas.openxmlformats.org/drawingml/2006/main"/>
-          <a:ln xmlns:a="http://schemas.openxmlformats.org/drawingml/2006/main" w="0">
-            <a:noFill/>
-          </a:ln>
-        </p:spPr>
-        <p:txBody>
-          <a:bodyPr xmlns:a="http://schemas.openxmlformats.org/drawingml/2006/main">
-            <a:noAutofit/>
-          </a:bodyPr>
-          <a:lstStyle xmlns:a="http://schemas.openxmlformats.org/drawingml/2006/main"/>
+              <a:t>?- doble(s(0),Y).</a:t>
+            </a:r>
+          </a:p>
           <a:p xmlns:a="http://schemas.openxmlformats.org/drawingml/2006/main">
             <a:pPr algn="l">
               <a:defRPr sz="2232" b="0">
@@ -28456,29 +24974,6 @@
                 <a:ea typeface="Consolas"/>
                 <a:cs typeface="Consolas"/>
               </a:rPr>
-              <a:t>?- doble(s(0),Y).</a:t>
-            </a:r>
-          </a:p>
-          <a:p xmlns:a="http://schemas.openxmlformats.org/drawingml/2006/main">
-            <a:pPr algn="l">
-              <a:defRPr sz="2232" b="0">
-                <a:solidFill>
-                  <a:srgbClr val="263442"/>
-                </a:solidFill>
-                <a:latin typeface="Consolas"/>
-                <a:ea typeface="Consolas"/>
-                <a:cs typeface="Consolas"/>
-              </a:defRPr>
-            </a:pPr>
-            <a:r>
-              <a:rPr sz="2232" b="0">
-                <a:solidFill>
-                  <a:srgbClr val="263442"/>
-                </a:solidFill>
-                <a:latin typeface="Consolas"/>
-                <a:ea typeface="Consolas"/>
-                <a:cs typeface="Consolas"/>
-              </a:rPr>
               <a:t>?- doble(X,s(s(0))).</a:t>
             </a:r>
           </a:p>
@@ -28536,64 +25031,7 @@
                 <a:ea typeface="Arial"/>
                 <a:cs typeface="Arial"/>
               </a:rPr>
-              <a:t>Completad la regla y predecid las dos respuestas.</a:t>
-            </a:r>
-          </a:p>
-        </p:txBody>
-      </p:sp>
-      <p:sp>
-        <p:nvSpPr>
-          <p:cNvPr id="15" name="">
-            <a:extLst xmlns:a="http://schemas.openxmlformats.org/drawingml/2006/main">
-              <a:ext uri="{FF2B5EF4-FFF2-40B4-BE49-F238E27FC236}">
-                <a16:creationId xmlns:a16="http://schemas.microsoft.com/office/drawing/2014/main" id="{21E5835D-493E-4579-B073-0415FCEDF6A4}"/>
-              </a:ext>
-            </a:extLst>
-          </p:cNvPr>
-          <p:cNvSpPr>
-            <a:spLocks xmlns:a="http://schemas.openxmlformats.org/drawingml/2006/main" noGrp="1"/>
-          </p:cNvSpPr>
-          <p:nvPr/>
-        </p:nvSpPr>
-        <p:spPr>
-          <a:xfrm xmlns:a="http://schemas.openxmlformats.org/drawingml/2006/main">
-            <a:off x="822960" y="6089904"/>
-            <a:ext cx="10149840" cy="173736"/>
-          </a:xfrm>
-          <a:prstGeom xmlns:a="http://schemas.openxmlformats.org/drawingml/2006/main" prst="rect">
-            <a:avLst/>
-          </a:prstGeom>
-          <a:noFill xmlns:a="http://schemas.openxmlformats.org/drawingml/2006/main"/>
-          <a:ln xmlns:a="http://schemas.openxmlformats.org/drawingml/2006/main" w="0">
-            <a:noFill/>
-          </a:ln>
-        </p:spPr>
-        <p:txBody>
-          <a:bodyPr xmlns:a="http://schemas.openxmlformats.org/drawingml/2006/main">
-            <a:noAutofit/>
-          </a:bodyPr>
-          <a:lstStyle xmlns:a="http://schemas.openxmlformats.org/drawingml/2006/main"/>
-          <a:p xmlns:a="http://schemas.openxmlformats.org/drawingml/2006/main">
-            <a:pPr algn="l">
-              <a:defRPr sz="864" b="0">
-                <a:solidFill>
-                  <a:srgbClr val="60707B"/>
-                </a:solidFill>
-                <a:latin typeface="Arial"/>
-                <a:ea typeface="Arial"/>
-                <a:cs typeface="Arial"/>
-              </a:defRPr>
-            </a:pPr>
-            <a:r>
-              <a:rPr sz="864" b="0">
-                <a:solidFill>
-                  <a:srgbClr val="60707B"/>
-                </a:solidFill>
-                <a:latin typeface="Arial"/>
-                <a:ea typeface="Arial"/>
-                <a:cs typeface="Arial"/>
-              </a:rPr>
-              <a:t>Usad únicamente suma/3. Firma: doble/2. Reutilizamos natural.pl.</a:t>
+              <a:t>Definid doble/2 y predecid las dos respuestas.</a:t>
             </a:r>
           </a:p>
         </p:txBody>
